--- a/examples/effects/example_editable_slide.pptx
+++ b/examples/effects/example_editable_slide.pptx
@@ -884,17 +884,17 @@
         <p:spPr>
           <a:xfrm>
             <a:off x="0" y="0"/>
-            <a:ext cx="12191695" cy="6858000"/>
+            <a:ext cx="12191695" cy="960120"/>
           </a:xfrm>
           <a:prstGeom prst="rect">
             <a:avLst/>
           </a:prstGeom>
           <a:solidFill>
-            <a:srgbClr val="F5F7FA"/>
+            <a:srgbClr val="12202D"/>
           </a:solidFill>
           <a:ln w="12700">
             <a:solidFill>
-              <a:srgbClr val="F5F7FA">
+              <a:srgbClr val="12202D">
                 <a:alpha val="0"/>
               </a:srgbClr>
             </a:solidFill>
@@ -910,34 +910,7 @@
         </p:nvSpPr>
         <p:spPr>
           <a:xfrm>
-            <a:off x="0" y="0"/>
-            <a:ext cx="12191695" cy="950976"/>
-          </a:xfrm>
-          <a:prstGeom prst="rect">
-            <a:avLst/>
-          </a:prstGeom>
-          <a:solidFill>
-            <a:srgbClr val="15202B"/>
-          </a:solidFill>
-          <a:ln w="12700">
-            <a:solidFill>
-              <a:srgbClr val="15202B">
-                <a:alpha val="0"/>
-              </a:srgbClr>
-            </a:solidFill>
-            <a:prstDash val="solid"/>
-          </a:ln>
-        </p:spPr>
-      </p:sp>
-      <p:sp>
-        <p:nvSpPr>
-          <p:cNvPr id="4" name="Shape 2"/>
-          <p:cNvSpPr/>
-          <p:nvPr/>
-        </p:nvSpPr>
-        <p:spPr>
-          <a:xfrm>
-            <a:off x="0" y="950976"/>
+            <a:off x="0" y="960120"/>
             <a:ext cx="12191695" cy="45720"/>
           </a:xfrm>
           <a:prstGeom prst="rect">
@@ -958,14 +931,14 @@
       </p:sp>
       <p:sp>
         <p:nvSpPr>
-          <p:cNvPr id="5" name="Text 3"/>
-          <p:cNvSpPr/>
-          <p:nvPr/>
-        </p:nvSpPr>
-        <p:spPr>
-          <a:xfrm>
-            <a:off x="402336" y="146304"/>
-            <a:ext cx="7772400" cy="384048"/>
+          <p:cNvPr id="4" name="Text 2"/>
+          <p:cNvSpPr/>
+          <p:nvPr/>
+        </p:nvSpPr>
+        <p:spPr>
+          <a:xfrm>
+            <a:off x="411480" y="182880"/>
+            <a:ext cx="4754880" cy="384048"/>
           </a:xfrm>
           <a:prstGeom prst="rect">
             <a:avLst/>
@@ -989,7 +962,7 @@
                 <a:ea typeface="Liberation Sans" pitchFamily="34" charset="-122"/>
                 <a:cs typeface="Liberation Sans" pitchFamily="34" charset="-120"/>
               </a:rPr>
-              <a:t>PDE-Shaped Finite-Relaxation Neural Media</a:t>
+              <a:t>Image-to-PPT Demo</a:t>
             </a:r>
             <a:endParaRPr lang="en-US" sz="2600" dirty="0"/>
           </a:p>
@@ -997,14 +970,14 @@
       </p:sp>
       <p:sp>
         <p:nvSpPr>
-          <p:cNvPr id="6" name="Text 4"/>
-          <p:cNvSpPr/>
-          <p:nvPr/>
-        </p:nvSpPr>
-        <p:spPr>
-          <a:xfrm>
-            <a:off x="429768" y="557784"/>
-            <a:ext cx="7498080" cy="219456"/>
+          <p:cNvPr id="5" name="Text 3"/>
+          <p:cNvSpPr/>
+          <p:nvPr/>
+        </p:nvSpPr>
+        <p:spPr>
+          <a:xfrm>
+            <a:off x="438912" y="603504"/>
+            <a:ext cx="6217920" cy="182880"/>
           </a:xfrm>
           <a:prstGeom prst="rect">
             <a:avLst/>
@@ -1028,7 +1001,7 @@
                 <a:ea typeface="Liberation Sans" pitchFamily="34" charset="-122"/>
                 <a:cs typeface="Liberation Sans" pitchFamily="34" charset="-120"/>
               </a:rPr>
-              <a:t>Resolution-stable spatial binding through inspectable learned coefficient fields</a:t>
+              <a:t>Reference image -&gt; complete blocks -&gt; editable PowerPoint</a:t>
             </a:r>
             <a:endParaRPr lang="en-US" sz="1050" dirty="0"/>
           </a:p>
@@ -1036,28 +1009,26 @@
       </p:sp>
       <p:sp>
         <p:nvSpPr>
-          <p:cNvPr id="7" name="Shape 5"/>
-          <p:cNvSpPr/>
-          <p:nvPr/>
-        </p:nvSpPr>
-        <p:spPr>
-          <a:xfrm>
-            <a:off x="8458200" y="173736"/>
-            <a:ext cx="3310128" cy="502920"/>
+          <p:cNvPr id="6" name="Shape 4"/>
+          <p:cNvSpPr/>
+          <p:nvPr/>
+        </p:nvSpPr>
+        <p:spPr>
+          <a:xfrm>
+            <a:off x="8823960" y="237744"/>
+            <a:ext cx="2651760" cy="457200"/>
           </a:xfrm>
           <a:prstGeom prst="roundRect">
             <a:avLst>
-              <a:gd name="adj" fmla="val 12727"/>
+              <a:gd name="adj" fmla="val 12000"/>
             </a:avLst>
           </a:prstGeom>
           <a:solidFill>
-            <a:srgbClr val="FFFFFF">
-              <a:alpha val="12000"/>
-            </a:srgbClr>
+            <a:srgbClr val="324152"/>
           </a:solidFill>
           <a:ln w="12700">
             <a:solidFill>
-              <a:srgbClr val="FFFFFF">
+              <a:srgbClr val="324152">
                 <a:alpha val="0"/>
               </a:srgbClr>
             </a:solidFill>
@@ -1067,14 +1038,14 @@
       </p:sp>
       <p:sp>
         <p:nvSpPr>
-          <p:cNvPr id="8" name="Text 6"/>
-          <p:cNvSpPr/>
-          <p:nvPr/>
-        </p:nvSpPr>
-        <p:spPr>
-          <a:xfrm>
-            <a:off x="8641080" y="292608"/>
-            <a:ext cx="2935224" cy="164592"/>
+          <p:cNvPr id="7" name="Text 5"/>
+          <p:cNvSpPr/>
+          <p:nvPr/>
+        </p:nvSpPr>
+        <p:spPr>
+          <a:xfrm>
+            <a:off x="9098280" y="384048"/>
+            <a:ext cx="2103120" cy="91440"/>
           </a:xfrm>
           <a:prstGeom prst="rect">
             <a:avLst/>
@@ -1090,7 +1061,7 @@
               <a:buNone/>
             </a:pPr>
             <a:r>
-              <a:rPr lang="en-US" sz="820" dirty="0">
+              <a:rPr lang="en-US" sz="800" dirty="0">
                 <a:solidFill>
                   <a:srgbClr val="FFFFFF"/>
                 </a:solidFill>
@@ -1098,32 +1069,32 @@
                 <a:ea typeface="Liberation Sans" pitchFamily="34" charset="-122"/>
                 <a:cs typeface="Liberation Sans" pitchFamily="34" charset="-120"/>
               </a:rPr>
-              <a:t>Controlled computational study | Neural Processing Letters submission</a:t>
+              <a:t>Generic README Example</a:t>
             </a:r>
-            <a:endParaRPr lang="en-US" sz="820" dirty="0"/>
+            <a:endParaRPr lang="en-US" sz="800" dirty="0"/>
           </a:p>
         </p:txBody>
       </p:sp>
       <p:sp>
         <p:nvSpPr>
-          <p:cNvPr id="9" name="Shape 7"/>
-          <p:cNvSpPr/>
-          <p:nvPr/>
-        </p:nvSpPr>
-        <p:spPr>
-          <a:xfrm>
-            <a:off x="402336" y="1207008"/>
-            <a:ext cx="2743200" cy="5047488"/>
+          <p:cNvPr id="8" name="Shape 6"/>
+          <p:cNvSpPr/>
+          <p:nvPr/>
+        </p:nvSpPr>
+        <p:spPr>
+          <a:xfrm>
+            <a:off x="411480" y="1234440"/>
+            <a:ext cx="2971800" cy="4892040"/>
           </a:xfrm>
           <a:prstGeom prst="roundRect">
             <a:avLst>
-              <a:gd name="adj" fmla="val 2667"/>
+              <a:gd name="adj" fmla="val 2462"/>
             </a:avLst>
           </a:prstGeom>
           <a:solidFill>
             <a:srgbClr val="FFFFFF"/>
           </a:solidFill>
-          <a:ln w="10160">
+          <a:ln w="12700">
             <a:solidFill>
               <a:srgbClr val="D8E1EA"/>
             </a:solidFill>
@@ -1133,14 +1104,14 @@
       </p:sp>
       <p:sp>
         <p:nvSpPr>
-          <p:cNvPr id="10" name="Shape 8"/>
-          <p:cNvSpPr/>
-          <p:nvPr/>
-        </p:nvSpPr>
-        <p:spPr>
-          <a:xfrm>
-            <a:off x="402336" y="1207008"/>
-            <a:ext cx="2743200" cy="100584"/>
+          <p:cNvPr id="9" name="Shape 7"/>
+          <p:cNvSpPr/>
+          <p:nvPr/>
+        </p:nvSpPr>
+        <p:spPr>
+          <a:xfrm>
+            <a:off x="411480" y="1234440"/>
+            <a:ext cx="2971800" cy="109728"/>
           </a:xfrm>
           <a:prstGeom prst="rect">
             <a:avLst/>
@@ -1160,14 +1131,14 @@
       </p:sp>
       <p:sp>
         <p:nvSpPr>
-          <p:cNvPr id="11" name="Text 9"/>
-          <p:cNvSpPr/>
-          <p:nvPr/>
-        </p:nvSpPr>
-        <p:spPr>
-          <a:xfrm>
-            <a:off x="566928" y="1389888"/>
-            <a:ext cx="329184" cy="329184"/>
+          <p:cNvPr id="10" name="Text 8"/>
+          <p:cNvSpPr/>
+          <p:nvPr/>
+        </p:nvSpPr>
+        <p:spPr>
+          <a:xfrm>
+            <a:off x="594360" y="1435608"/>
+            <a:ext cx="347472" cy="347472"/>
           </a:xfrm>
           <a:prstGeom prst="ellipse">
             <a:avLst/>
@@ -1191,7 +1162,7 @@
               <a:buNone/>
             </a:pPr>
             <a:r>
-              <a:rPr lang="en-US" sz="1100" b="1" dirty="0">
+              <a:rPr lang="en-US" sz="1200" b="1" dirty="0">
                 <a:solidFill>
                   <a:srgbClr val="FFFFFF"/>
                 </a:solidFill>
@@ -1201,20 +1172,20 @@
               </a:rPr>
               <a:t>1</a:t>
             </a:r>
-            <a:endParaRPr lang="en-US" sz="1100" dirty="0"/>
+            <a:endParaRPr lang="en-US" sz="1200" dirty="0"/>
           </a:p>
         </p:txBody>
       </p:sp>
       <p:sp>
         <p:nvSpPr>
-          <p:cNvPr id="12" name="Text 10"/>
-          <p:cNvSpPr/>
-          <p:nvPr/>
-        </p:nvSpPr>
-        <p:spPr>
-          <a:xfrm>
-            <a:off x="987552" y="1371600"/>
-            <a:ext cx="1965960" cy="384048"/>
+          <p:cNvPr id="11" name="Text 9"/>
+          <p:cNvSpPr/>
+          <p:nvPr/>
+        </p:nvSpPr>
+        <p:spPr>
+          <a:xfrm>
+            <a:off x="1069848" y="1435608"/>
+            <a:ext cx="2057400" cy="347472"/>
           </a:xfrm>
           <a:prstGeom prst="rect">
             <a:avLst/>
@@ -1230,7 +1201,7 @@
               <a:buNone/>
             </a:pPr>
             <a:r>
-              <a:rPr lang="en-US" sz="1250" b="1" dirty="0">
+              <a:rPr lang="en-US" sz="1400" b="1" dirty="0">
                 <a:solidFill>
                   <a:srgbClr val="15202B"/>
                 </a:solidFill>
@@ -1238,32 +1209,32 @@
                 <a:ea typeface="Liberation Sans" pitchFamily="34" charset="-122"/>
                 <a:cs typeface="Liberation Sans" pitchFamily="34" charset="-120"/>
               </a:rPr>
-              <a:t>Spatial binding task</a:t>
+              <a:t>Reference</a:t>
             </a:r>
-            <a:endParaRPr lang="en-US" sz="1250" dirty="0"/>
+            <a:endParaRPr lang="en-US" sz="1400" dirty="0"/>
           </a:p>
         </p:txBody>
       </p:sp>
       <p:sp>
         <p:nvSpPr>
-          <p:cNvPr id="13" name="Shape 11"/>
-          <p:cNvSpPr/>
-          <p:nvPr/>
-        </p:nvSpPr>
-        <p:spPr>
-          <a:xfrm>
-            <a:off x="3364992" y="1207008"/>
-            <a:ext cx="3657600" cy="5047488"/>
+          <p:cNvPr id="12" name="Shape 10"/>
+          <p:cNvSpPr/>
+          <p:nvPr/>
+        </p:nvSpPr>
+        <p:spPr>
+          <a:xfrm>
+            <a:off x="3703320" y="1234440"/>
+            <a:ext cx="2971800" cy="4892040"/>
           </a:xfrm>
           <a:prstGeom prst="roundRect">
             <a:avLst>
-              <a:gd name="adj" fmla="val 2000"/>
+              <a:gd name="adj" fmla="val 2462"/>
             </a:avLst>
           </a:prstGeom>
           <a:solidFill>
             <a:srgbClr val="FFFFFF"/>
           </a:solidFill>
-          <a:ln w="10160">
+          <a:ln w="12700">
             <a:solidFill>
               <a:srgbClr val="D8E1EA"/>
             </a:solidFill>
@@ -1273,14 +1244,14 @@
       </p:sp>
       <p:sp>
         <p:nvSpPr>
-          <p:cNvPr id="14" name="Shape 12"/>
-          <p:cNvSpPr/>
-          <p:nvPr/>
-        </p:nvSpPr>
-        <p:spPr>
-          <a:xfrm>
-            <a:off x="3364992" y="1207008"/>
-            <a:ext cx="3657600" cy="100584"/>
+          <p:cNvPr id="13" name="Shape 11"/>
+          <p:cNvSpPr/>
+          <p:nvPr/>
+        </p:nvSpPr>
+        <p:spPr>
+          <a:xfrm>
+            <a:off x="3703320" y="1234440"/>
+            <a:ext cx="2971800" cy="109728"/>
           </a:xfrm>
           <a:prstGeom prst="rect">
             <a:avLst/>
@@ -1300,14 +1271,14 @@
       </p:sp>
       <p:sp>
         <p:nvSpPr>
-          <p:cNvPr id="15" name="Text 13"/>
-          <p:cNvSpPr/>
-          <p:nvPr/>
-        </p:nvSpPr>
-        <p:spPr>
-          <a:xfrm>
-            <a:off x="3529584" y="1389888"/>
-            <a:ext cx="329184" cy="329184"/>
+          <p:cNvPr id="14" name="Text 12"/>
+          <p:cNvSpPr/>
+          <p:nvPr/>
+        </p:nvSpPr>
+        <p:spPr>
+          <a:xfrm>
+            <a:off x="3886200" y="1435608"/>
+            <a:ext cx="347472" cy="347472"/>
           </a:xfrm>
           <a:prstGeom prst="ellipse">
             <a:avLst/>
@@ -1331,7 +1302,7 @@
               <a:buNone/>
             </a:pPr>
             <a:r>
-              <a:rPr lang="en-US" sz="1100" b="1" dirty="0">
+              <a:rPr lang="en-US" sz="1200" b="1" dirty="0">
                 <a:solidFill>
                   <a:srgbClr val="FFFFFF"/>
                 </a:solidFill>
@@ -1341,20 +1312,20 @@
               </a:rPr>
               <a:t>2</a:t>
             </a:r>
-            <a:endParaRPr lang="en-US" sz="1100" dirty="0"/>
+            <a:endParaRPr lang="en-US" sz="1200" dirty="0"/>
           </a:p>
         </p:txBody>
       </p:sp>
       <p:sp>
         <p:nvSpPr>
-          <p:cNvPr id="16" name="Text 14"/>
-          <p:cNvSpPr/>
-          <p:nvPr/>
-        </p:nvSpPr>
-        <p:spPr>
-          <a:xfrm>
-            <a:off x="3950208" y="1371600"/>
-            <a:ext cx="2880360" cy="384048"/>
+          <p:cNvPr id="15" name="Text 13"/>
+          <p:cNvSpPr/>
+          <p:nvPr/>
+        </p:nvSpPr>
+        <p:spPr>
+          <a:xfrm>
+            <a:off x="4361688" y="1435608"/>
+            <a:ext cx="2057400" cy="347472"/>
           </a:xfrm>
           <a:prstGeom prst="rect">
             <a:avLst/>
@@ -1370,7 +1341,7 @@
               <a:buNone/>
             </a:pPr>
             <a:r>
-              <a:rPr lang="en-US" sz="1250" b="1" dirty="0">
+              <a:rPr lang="en-US" sz="1400" b="1" dirty="0">
                 <a:solidFill>
                   <a:srgbClr val="15202B"/>
                 </a:solidFill>
@@ -1378,32 +1349,32 @@
                 <a:ea typeface="Liberation Sans" pitchFamily="34" charset="-122"/>
                 <a:cs typeface="Liberation Sans" pitchFamily="34" charset="-120"/>
               </a:rPr>
-              <a:t>PDE-shaped medium</a:t>
+              <a:t>Blocks</a:t>
             </a:r>
-            <a:endParaRPr lang="en-US" sz="1250" dirty="0"/>
+            <a:endParaRPr lang="en-US" sz="1400" dirty="0"/>
           </a:p>
         </p:txBody>
       </p:sp>
       <p:sp>
         <p:nvSpPr>
-          <p:cNvPr id="17" name="Shape 15"/>
-          <p:cNvSpPr/>
-          <p:nvPr/>
-        </p:nvSpPr>
-        <p:spPr>
-          <a:xfrm>
-            <a:off x="7242048" y="1207008"/>
-            <a:ext cx="4535424" cy="5047488"/>
+          <p:cNvPr id="16" name="Shape 14"/>
+          <p:cNvSpPr/>
+          <p:nvPr/>
+        </p:nvSpPr>
+        <p:spPr>
+          <a:xfrm>
+            <a:off x="6995160" y="1234440"/>
+            <a:ext cx="4800600" cy="4892040"/>
           </a:xfrm>
           <a:prstGeom prst="roundRect">
             <a:avLst>
-              <a:gd name="adj" fmla="val 1613"/>
+              <a:gd name="adj" fmla="val 1524"/>
             </a:avLst>
           </a:prstGeom>
           <a:solidFill>
             <a:srgbClr val="FFFFFF"/>
           </a:solidFill>
-          <a:ln w="10160">
+          <a:ln w="12700">
             <a:solidFill>
               <a:srgbClr val="D8E1EA"/>
             </a:solidFill>
@@ -1413,14 +1384,14 @@
       </p:sp>
       <p:sp>
         <p:nvSpPr>
-          <p:cNvPr id="18" name="Shape 16"/>
-          <p:cNvSpPr/>
-          <p:nvPr/>
-        </p:nvSpPr>
-        <p:spPr>
-          <a:xfrm>
-            <a:off x="7242048" y="1207008"/>
-            <a:ext cx="4535424" cy="100584"/>
+          <p:cNvPr id="17" name="Shape 15"/>
+          <p:cNvSpPr/>
+          <p:nvPr/>
+        </p:nvSpPr>
+        <p:spPr>
+          <a:xfrm>
+            <a:off x="6995160" y="1234440"/>
+            <a:ext cx="4800600" cy="109728"/>
           </a:xfrm>
           <a:prstGeom prst="rect">
             <a:avLst/>
@@ -1440,14 +1411,14 @@
       </p:sp>
       <p:sp>
         <p:nvSpPr>
-          <p:cNvPr id="19" name="Text 17"/>
-          <p:cNvSpPr/>
-          <p:nvPr/>
-        </p:nvSpPr>
-        <p:spPr>
-          <a:xfrm>
-            <a:off x="7406640" y="1389888"/>
-            <a:ext cx="329184" cy="329184"/>
+          <p:cNvPr id="18" name="Text 16"/>
+          <p:cNvSpPr/>
+          <p:nvPr/>
+        </p:nvSpPr>
+        <p:spPr>
+          <a:xfrm>
+            <a:off x="7178040" y="1435608"/>
+            <a:ext cx="347472" cy="347472"/>
           </a:xfrm>
           <a:prstGeom prst="ellipse">
             <a:avLst/>
@@ -1471,7 +1442,7 @@
               <a:buNone/>
             </a:pPr>
             <a:r>
-              <a:rPr lang="en-US" sz="1100" b="1" dirty="0">
+              <a:rPr lang="en-US" sz="1200" b="1" dirty="0">
                 <a:solidFill>
                   <a:srgbClr val="FFFFFF"/>
                 </a:solidFill>
@@ -1481,20 +1452,20 @@
               </a:rPr>
               <a:t>3</a:t>
             </a:r>
-            <a:endParaRPr lang="en-US" sz="1100" dirty="0"/>
+            <a:endParaRPr lang="en-US" sz="1200" dirty="0"/>
           </a:p>
         </p:txBody>
       </p:sp>
       <p:sp>
         <p:nvSpPr>
-          <p:cNvPr id="20" name="Text 18"/>
-          <p:cNvSpPr/>
-          <p:nvPr/>
-        </p:nvSpPr>
-        <p:spPr>
-          <a:xfrm>
-            <a:off x="7827264" y="1371600"/>
-            <a:ext cx="3758184" cy="384048"/>
+          <p:cNvPr id="19" name="Text 17"/>
+          <p:cNvSpPr/>
+          <p:nvPr/>
+        </p:nvSpPr>
+        <p:spPr>
+          <a:xfrm>
+            <a:off x="7653528" y="1435608"/>
+            <a:ext cx="3886200" cy="347472"/>
           </a:xfrm>
           <a:prstGeom prst="rect">
             <a:avLst/>
@@ -1510,7 +1481,7 @@
               <a:buNone/>
             </a:pPr>
             <a:r>
-              <a:rPr lang="en-US" sz="1250" b="1" dirty="0">
+              <a:rPr lang="en-US" sz="1400" b="1" dirty="0">
                 <a:solidFill>
                   <a:srgbClr val="15202B"/>
                 </a:solidFill>
@@ -1518,69 +1489,704 @@
                 <a:ea typeface="Liberation Sans" pitchFamily="34" charset="-122"/>
                 <a:cs typeface="Liberation Sans" pitchFamily="34" charset="-120"/>
               </a:rPr>
-              <a:t>Transfer and mechanism audit</a:t>
+              <a:t>Editable PPT</a:t>
             </a:r>
-            <a:endParaRPr lang="en-US" sz="1250" dirty="0"/>
+            <a:endParaRPr lang="en-US" sz="1400" dirty="0"/>
           </a:p>
         </p:txBody>
       </p:sp>
-      <p:pic>
-        <p:nvPicPr>
-          <p:cNvPr id="21" name="Image 0" descr="/tmp/ttn_ppt_design/assets/task_focus.png">    </p:cNvPr>
-          <p:cNvPicPr>
-            <a:picLocks noChangeAspect="1"/>
-          </p:cNvPicPr>
-          <p:nvPr/>
-        </p:nvPicPr>
-        <p:blipFill>
-          <a:blip r:embed="rId1"/>
-          <a:stretch>
-            <a:fillRect/>
-          </a:stretch>
-        </p:blipFill>
-        <p:spPr>
-          <a:xfrm>
-            <a:off x="837610" y="1783080"/>
-            <a:ext cx="1854363" cy="3136392"/>
+      <p:sp>
+        <p:nvSpPr>
+          <p:cNvPr id="20" name="Shape 18"/>
+          <p:cNvSpPr/>
+          <p:nvPr/>
+        </p:nvSpPr>
+        <p:spPr>
+          <a:xfrm>
+            <a:off x="896112" y="2011680"/>
+            <a:ext cx="1280160" cy="1280160"/>
           </a:xfrm>
           <a:prstGeom prst="rect">
             <a:avLst/>
           </a:prstGeom>
-        </p:spPr>
-      </p:pic>
-      <p:sp>
-        <p:nvSpPr>
-          <p:cNvPr id="22" name="Shape 19"/>
-          <p:cNvSpPr/>
-          <p:nvPr/>
-        </p:nvSpPr>
-        <p:spPr>
-          <a:xfrm>
-            <a:off x="749808" y="5020056"/>
-            <a:ext cx="2011680" cy="0"/>
-          </a:xfrm>
-          <a:prstGeom prst="line">
-            <a:avLst/>
-          </a:prstGeom>
-          <a:noFill/>
+          <a:solidFill>
+            <a:srgbClr val="FFFFFF"/>
+          </a:solidFill>
           <a:ln w="12700">
             <a:solidFill>
-              <a:srgbClr val="D8E1EA"/>
-            </a:solidFill>
-            <a:prstDash val="solid"/>
-          </a:ln>
-        </p:spPr>
-      </p:sp>
-      <p:sp>
-        <p:nvSpPr>
-          <p:cNvPr id="23" name="Text 20"/>
-          <p:cNvSpPr/>
-          <p:nvPr/>
-        </p:nvSpPr>
-        <p:spPr>
-          <a:xfrm>
-            <a:off x="621792" y="5138928"/>
-            <a:ext cx="2212848" cy="566928"/>
+              <a:srgbClr val="1F2933"/>
+            </a:solidFill>
+            <a:prstDash val="solid"/>
+          </a:ln>
+        </p:spPr>
+      </p:sp>
+      <p:sp>
+        <p:nvSpPr>
+          <p:cNvPr id="21" name="Shape 19"/>
+          <p:cNvSpPr/>
+          <p:nvPr/>
+        </p:nvSpPr>
+        <p:spPr>
+          <a:xfrm>
+            <a:off x="1056132" y="2011680"/>
+            <a:ext cx="0" cy="1280160"/>
+          </a:xfrm>
+          <a:prstGeom prst="line">
+            <a:avLst/>
+          </a:prstGeom>
+          <a:noFill/>
+          <a:ln w="5080">
+            <a:solidFill>
+              <a:srgbClr val="E5EAF0"/>
+            </a:solidFill>
+            <a:prstDash val="solid"/>
+          </a:ln>
+        </p:spPr>
+      </p:sp>
+      <p:sp>
+        <p:nvSpPr>
+          <p:cNvPr id="22" name="Shape 20"/>
+          <p:cNvSpPr/>
+          <p:nvPr/>
+        </p:nvSpPr>
+        <p:spPr>
+          <a:xfrm>
+            <a:off x="896112" y="2171700"/>
+            <a:ext cx="1280160" cy="0"/>
+          </a:xfrm>
+          <a:prstGeom prst="line">
+            <a:avLst/>
+          </a:prstGeom>
+          <a:noFill/>
+          <a:ln w="5080">
+            <a:solidFill>
+              <a:srgbClr val="E5EAF0"/>
+            </a:solidFill>
+            <a:prstDash val="solid"/>
+          </a:ln>
+        </p:spPr>
+      </p:sp>
+      <p:sp>
+        <p:nvSpPr>
+          <p:cNvPr id="23" name="Shape 21"/>
+          <p:cNvSpPr/>
+          <p:nvPr/>
+        </p:nvSpPr>
+        <p:spPr>
+          <a:xfrm>
+            <a:off x="1216152" y="2011680"/>
+            <a:ext cx="0" cy="1280160"/>
+          </a:xfrm>
+          <a:prstGeom prst="line">
+            <a:avLst/>
+          </a:prstGeom>
+          <a:noFill/>
+          <a:ln w="5080">
+            <a:solidFill>
+              <a:srgbClr val="E5EAF0"/>
+            </a:solidFill>
+            <a:prstDash val="solid"/>
+          </a:ln>
+        </p:spPr>
+      </p:sp>
+      <p:sp>
+        <p:nvSpPr>
+          <p:cNvPr id="24" name="Shape 22"/>
+          <p:cNvSpPr/>
+          <p:nvPr/>
+        </p:nvSpPr>
+        <p:spPr>
+          <a:xfrm>
+            <a:off x="896112" y="2331720"/>
+            <a:ext cx="1280160" cy="0"/>
+          </a:xfrm>
+          <a:prstGeom prst="line">
+            <a:avLst/>
+          </a:prstGeom>
+          <a:noFill/>
+          <a:ln w="5080">
+            <a:solidFill>
+              <a:srgbClr val="E5EAF0"/>
+            </a:solidFill>
+            <a:prstDash val="solid"/>
+          </a:ln>
+        </p:spPr>
+      </p:sp>
+      <p:sp>
+        <p:nvSpPr>
+          <p:cNvPr id="25" name="Shape 23"/>
+          <p:cNvSpPr/>
+          <p:nvPr/>
+        </p:nvSpPr>
+        <p:spPr>
+          <a:xfrm>
+            <a:off x="1376172" y="2011680"/>
+            <a:ext cx="0" cy="1280160"/>
+          </a:xfrm>
+          <a:prstGeom prst="line">
+            <a:avLst/>
+          </a:prstGeom>
+          <a:noFill/>
+          <a:ln w="5080">
+            <a:solidFill>
+              <a:srgbClr val="E5EAF0"/>
+            </a:solidFill>
+            <a:prstDash val="solid"/>
+          </a:ln>
+        </p:spPr>
+      </p:sp>
+      <p:sp>
+        <p:nvSpPr>
+          <p:cNvPr id="26" name="Shape 24"/>
+          <p:cNvSpPr/>
+          <p:nvPr/>
+        </p:nvSpPr>
+        <p:spPr>
+          <a:xfrm>
+            <a:off x="896112" y="2491740"/>
+            <a:ext cx="1280160" cy="0"/>
+          </a:xfrm>
+          <a:prstGeom prst="line">
+            <a:avLst/>
+          </a:prstGeom>
+          <a:noFill/>
+          <a:ln w="5080">
+            <a:solidFill>
+              <a:srgbClr val="E5EAF0"/>
+            </a:solidFill>
+            <a:prstDash val="solid"/>
+          </a:ln>
+        </p:spPr>
+      </p:sp>
+      <p:sp>
+        <p:nvSpPr>
+          <p:cNvPr id="27" name="Shape 25"/>
+          <p:cNvSpPr/>
+          <p:nvPr/>
+        </p:nvSpPr>
+        <p:spPr>
+          <a:xfrm>
+            <a:off x="1536192" y="2011680"/>
+            <a:ext cx="0" cy="1280160"/>
+          </a:xfrm>
+          <a:prstGeom prst="line">
+            <a:avLst/>
+          </a:prstGeom>
+          <a:noFill/>
+          <a:ln w="5080">
+            <a:solidFill>
+              <a:srgbClr val="E5EAF0"/>
+            </a:solidFill>
+            <a:prstDash val="solid"/>
+          </a:ln>
+        </p:spPr>
+      </p:sp>
+      <p:sp>
+        <p:nvSpPr>
+          <p:cNvPr id="28" name="Shape 26"/>
+          <p:cNvSpPr/>
+          <p:nvPr/>
+        </p:nvSpPr>
+        <p:spPr>
+          <a:xfrm>
+            <a:off x="896112" y="2651760"/>
+            <a:ext cx="1280160" cy="0"/>
+          </a:xfrm>
+          <a:prstGeom prst="line">
+            <a:avLst/>
+          </a:prstGeom>
+          <a:noFill/>
+          <a:ln w="5080">
+            <a:solidFill>
+              <a:srgbClr val="E5EAF0"/>
+            </a:solidFill>
+            <a:prstDash val="solid"/>
+          </a:ln>
+        </p:spPr>
+      </p:sp>
+      <p:sp>
+        <p:nvSpPr>
+          <p:cNvPr id="29" name="Shape 27"/>
+          <p:cNvSpPr/>
+          <p:nvPr/>
+        </p:nvSpPr>
+        <p:spPr>
+          <a:xfrm>
+            <a:off x="1696212" y="2011680"/>
+            <a:ext cx="0" cy="1280160"/>
+          </a:xfrm>
+          <a:prstGeom prst="line">
+            <a:avLst/>
+          </a:prstGeom>
+          <a:noFill/>
+          <a:ln w="5080">
+            <a:solidFill>
+              <a:srgbClr val="E5EAF0"/>
+            </a:solidFill>
+            <a:prstDash val="solid"/>
+          </a:ln>
+        </p:spPr>
+      </p:sp>
+      <p:sp>
+        <p:nvSpPr>
+          <p:cNvPr id="30" name="Shape 28"/>
+          <p:cNvSpPr/>
+          <p:nvPr/>
+        </p:nvSpPr>
+        <p:spPr>
+          <a:xfrm>
+            <a:off x="896112" y="2811780"/>
+            <a:ext cx="1280160" cy="0"/>
+          </a:xfrm>
+          <a:prstGeom prst="line">
+            <a:avLst/>
+          </a:prstGeom>
+          <a:noFill/>
+          <a:ln w="5080">
+            <a:solidFill>
+              <a:srgbClr val="E5EAF0"/>
+            </a:solidFill>
+            <a:prstDash val="solid"/>
+          </a:ln>
+        </p:spPr>
+      </p:sp>
+      <p:sp>
+        <p:nvSpPr>
+          <p:cNvPr id="31" name="Shape 29"/>
+          <p:cNvSpPr/>
+          <p:nvPr/>
+        </p:nvSpPr>
+        <p:spPr>
+          <a:xfrm>
+            <a:off x="1856232" y="2011680"/>
+            <a:ext cx="0" cy="1280160"/>
+          </a:xfrm>
+          <a:prstGeom prst="line">
+            <a:avLst/>
+          </a:prstGeom>
+          <a:noFill/>
+          <a:ln w="5080">
+            <a:solidFill>
+              <a:srgbClr val="E5EAF0"/>
+            </a:solidFill>
+            <a:prstDash val="solid"/>
+          </a:ln>
+        </p:spPr>
+      </p:sp>
+      <p:sp>
+        <p:nvSpPr>
+          <p:cNvPr id="32" name="Shape 30"/>
+          <p:cNvSpPr/>
+          <p:nvPr/>
+        </p:nvSpPr>
+        <p:spPr>
+          <a:xfrm>
+            <a:off x="896112" y="2971800"/>
+            <a:ext cx="1280160" cy="0"/>
+          </a:xfrm>
+          <a:prstGeom prst="line">
+            <a:avLst/>
+          </a:prstGeom>
+          <a:noFill/>
+          <a:ln w="5080">
+            <a:solidFill>
+              <a:srgbClr val="E5EAF0"/>
+            </a:solidFill>
+            <a:prstDash val="solid"/>
+          </a:ln>
+        </p:spPr>
+      </p:sp>
+      <p:sp>
+        <p:nvSpPr>
+          <p:cNvPr id="33" name="Shape 31"/>
+          <p:cNvSpPr/>
+          <p:nvPr/>
+        </p:nvSpPr>
+        <p:spPr>
+          <a:xfrm>
+            <a:off x="2016252" y="2011680"/>
+            <a:ext cx="0" cy="1280160"/>
+          </a:xfrm>
+          <a:prstGeom prst="line">
+            <a:avLst/>
+          </a:prstGeom>
+          <a:noFill/>
+          <a:ln w="5080">
+            <a:solidFill>
+              <a:srgbClr val="E5EAF0"/>
+            </a:solidFill>
+            <a:prstDash val="solid"/>
+          </a:ln>
+        </p:spPr>
+      </p:sp>
+      <p:sp>
+        <p:nvSpPr>
+          <p:cNvPr id="34" name="Shape 32"/>
+          <p:cNvSpPr/>
+          <p:nvPr/>
+        </p:nvSpPr>
+        <p:spPr>
+          <a:xfrm>
+            <a:off x="896112" y="3131820"/>
+            <a:ext cx="1280160" cy="0"/>
+          </a:xfrm>
+          <a:prstGeom prst="line">
+            <a:avLst/>
+          </a:prstGeom>
+          <a:noFill/>
+          <a:ln w="5080">
+            <a:solidFill>
+              <a:srgbClr val="E5EAF0"/>
+            </a:solidFill>
+            <a:prstDash val="solid"/>
+          </a:ln>
+        </p:spPr>
+      </p:sp>
+      <p:sp>
+        <p:nvSpPr>
+          <p:cNvPr id="35" name="Shape 33"/>
+          <p:cNvSpPr/>
+          <p:nvPr/>
+        </p:nvSpPr>
+        <p:spPr>
+          <a:xfrm>
+            <a:off x="987552" y="2587752"/>
+            <a:ext cx="612648" cy="0"/>
+          </a:xfrm>
+          <a:prstGeom prst="line">
+            <a:avLst/>
+          </a:prstGeom>
+          <a:noFill/>
+          <a:ln w="17780">
+            <a:solidFill>
+              <a:srgbClr val="0969DA"/>
+            </a:solidFill>
+            <a:prstDash val="solid"/>
+          </a:ln>
+        </p:spPr>
+      </p:sp>
+      <p:sp>
+        <p:nvSpPr>
+          <p:cNvPr id="36" name="Shape 34"/>
+          <p:cNvSpPr/>
+          <p:nvPr/>
+        </p:nvSpPr>
+        <p:spPr>
+          <a:xfrm>
+            <a:off x="1600200" y="2587752"/>
+            <a:ext cx="0" cy="630936"/>
+          </a:xfrm>
+          <a:prstGeom prst="line">
+            <a:avLst/>
+          </a:prstGeom>
+          <a:noFill/>
+          <a:ln w="17780">
+            <a:solidFill>
+              <a:srgbClr val="FF7A1A"/>
+            </a:solidFill>
+            <a:prstDash val="solid"/>
+          </a:ln>
+        </p:spPr>
+      </p:sp>
+      <p:sp>
+        <p:nvSpPr>
+          <p:cNvPr id="37" name="Shape 35"/>
+          <p:cNvSpPr/>
+          <p:nvPr/>
+        </p:nvSpPr>
+        <p:spPr>
+          <a:xfrm>
+            <a:off x="932688" y="2532888"/>
+            <a:ext cx="109728" cy="109728"/>
+          </a:xfrm>
+          <a:prstGeom prst="ellipse">
+            <a:avLst/>
+          </a:prstGeom>
+          <a:solidFill>
+            <a:srgbClr val="0969DA"/>
+          </a:solidFill>
+          <a:ln w="12700">
+            <a:solidFill>
+              <a:srgbClr val="0969DA">
+                <a:alpha val="0"/>
+              </a:srgbClr>
+            </a:solidFill>
+            <a:prstDash val="solid"/>
+          </a:ln>
+        </p:spPr>
+      </p:sp>
+      <p:sp>
+        <p:nvSpPr>
+          <p:cNvPr id="38" name="Shape 36"/>
+          <p:cNvSpPr/>
+          <p:nvPr/>
+        </p:nvSpPr>
+        <p:spPr>
+          <a:xfrm>
+            <a:off x="1545336" y="3163824"/>
+            <a:ext cx="109728" cy="109728"/>
+          </a:xfrm>
+          <a:prstGeom prst="ellipse">
+            <a:avLst/>
+          </a:prstGeom>
+          <a:solidFill>
+            <a:srgbClr val="FF7A1A"/>
+          </a:solidFill>
+          <a:ln w="12700">
+            <a:solidFill>
+              <a:srgbClr val="FF7A1A">
+                <a:alpha val="0"/>
+              </a:srgbClr>
+            </a:solidFill>
+            <a:prstDash val="solid"/>
+          </a:ln>
+        </p:spPr>
+      </p:sp>
+      <p:sp>
+        <p:nvSpPr>
+          <p:cNvPr id="39" name="Shape 37"/>
+          <p:cNvSpPr/>
+          <p:nvPr/>
+        </p:nvSpPr>
+        <p:spPr>
+          <a:xfrm>
+            <a:off x="1517904" y="2505456"/>
+            <a:ext cx="164592" cy="164592"/>
+          </a:xfrm>
+          <a:prstGeom prst="sun">
+            <a:avLst/>
+          </a:prstGeom>
+          <a:solidFill>
+            <a:srgbClr val="FACC15"/>
+          </a:solidFill>
+          <a:ln w="12700">
+            <a:solidFill>
+              <a:srgbClr val="FACC15">
+                <a:alpha val="0"/>
+              </a:srgbClr>
+            </a:solidFill>
+            <a:prstDash val="solid"/>
+          </a:ln>
+        </p:spPr>
+      </p:sp>
+      <p:sp>
+        <p:nvSpPr>
+          <p:cNvPr id="40" name="Shape 38"/>
+          <p:cNvSpPr/>
+          <p:nvPr/>
+        </p:nvSpPr>
+        <p:spPr>
+          <a:xfrm>
+            <a:off x="896112" y="3611880"/>
+            <a:ext cx="662940" cy="480060"/>
+          </a:xfrm>
+          <a:prstGeom prst="rect">
+            <a:avLst/>
+          </a:prstGeom>
+          <a:solidFill>
+            <a:srgbClr val="0969DA"/>
+          </a:solidFill>
+          <a:ln w="12700">
+            <a:solidFill>
+              <a:srgbClr val="0969DA">
+                <a:alpha val="0"/>
+              </a:srgbClr>
+            </a:solidFill>
+            <a:prstDash val="solid"/>
+          </a:ln>
+        </p:spPr>
+      </p:sp>
+      <p:sp>
+        <p:nvSpPr>
+          <p:cNvPr id="41" name="Shape 39"/>
+          <p:cNvSpPr/>
+          <p:nvPr/>
+        </p:nvSpPr>
+        <p:spPr>
+          <a:xfrm>
+            <a:off x="1559052" y="3611880"/>
+            <a:ext cx="662940" cy="480060"/>
+          </a:xfrm>
+          <a:prstGeom prst="rect">
+            <a:avLst/>
+          </a:prstGeom>
+          <a:solidFill>
+            <a:srgbClr val="2DA44E"/>
+          </a:solidFill>
+          <a:ln w="12700">
+            <a:solidFill>
+              <a:srgbClr val="2DA44E">
+                <a:alpha val="0"/>
+              </a:srgbClr>
+            </a:solidFill>
+            <a:prstDash val="solid"/>
+          </a:ln>
+        </p:spPr>
+      </p:sp>
+      <p:sp>
+        <p:nvSpPr>
+          <p:cNvPr id="42" name="Shape 40"/>
+          <p:cNvSpPr/>
+          <p:nvPr/>
+        </p:nvSpPr>
+        <p:spPr>
+          <a:xfrm>
+            <a:off x="896112" y="4091940"/>
+            <a:ext cx="662940" cy="480060"/>
+          </a:xfrm>
+          <a:prstGeom prst="rect">
+            <a:avLst/>
+          </a:prstGeom>
+          <a:solidFill>
+            <a:srgbClr val="6F42C1"/>
+          </a:solidFill>
+          <a:ln w="12700">
+            <a:solidFill>
+              <a:srgbClr val="6F42C1">
+                <a:alpha val="0"/>
+              </a:srgbClr>
+            </a:solidFill>
+            <a:prstDash val="solid"/>
+          </a:ln>
+        </p:spPr>
+      </p:sp>
+      <p:sp>
+        <p:nvSpPr>
+          <p:cNvPr id="43" name="Shape 41"/>
+          <p:cNvSpPr/>
+          <p:nvPr/>
+        </p:nvSpPr>
+        <p:spPr>
+          <a:xfrm>
+            <a:off x="1559052" y="4091940"/>
+            <a:ext cx="662940" cy="480060"/>
+          </a:xfrm>
+          <a:prstGeom prst="rect">
+            <a:avLst/>
+          </a:prstGeom>
+          <a:solidFill>
+            <a:srgbClr val="FF7A1A"/>
+          </a:solidFill>
+          <a:ln w="12700">
+            <a:solidFill>
+              <a:srgbClr val="FF7A1A">
+                <a:alpha val="0"/>
+              </a:srgbClr>
+            </a:solidFill>
+            <a:prstDash val="solid"/>
+          </a:ln>
+        </p:spPr>
+      </p:sp>
+      <p:sp>
+        <p:nvSpPr>
+          <p:cNvPr id="44" name="Shape 42"/>
+          <p:cNvSpPr/>
+          <p:nvPr/>
+        </p:nvSpPr>
+        <p:spPr>
+          <a:xfrm>
+            <a:off x="1559052" y="3611880"/>
+            <a:ext cx="0" cy="960120"/>
+          </a:xfrm>
+          <a:prstGeom prst="line">
+            <a:avLst/>
+          </a:prstGeom>
+          <a:noFill/>
+          <a:ln w="17780">
+            <a:solidFill>
+              <a:srgbClr val="FFFFFF"/>
+            </a:solidFill>
+            <a:prstDash val="solid"/>
+          </a:ln>
+        </p:spPr>
+      </p:sp>
+      <p:sp>
+        <p:nvSpPr>
+          <p:cNvPr id="45" name="Shape 43"/>
+          <p:cNvSpPr/>
+          <p:nvPr/>
+        </p:nvSpPr>
+        <p:spPr>
+          <a:xfrm>
+            <a:off x="896112" y="4091940"/>
+            <a:ext cx="1325880" cy="0"/>
+          </a:xfrm>
+          <a:prstGeom prst="line">
+            <a:avLst/>
+          </a:prstGeom>
+          <a:noFill/>
+          <a:ln w="17780">
+            <a:solidFill>
+              <a:srgbClr val="FFFFFF"/>
+            </a:solidFill>
+            <a:prstDash val="solid"/>
+          </a:ln>
+        </p:spPr>
+      </p:sp>
+      <p:sp>
+        <p:nvSpPr>
+          <p:cNvPr id="46" name="Shape 44"/>
+          <p:cNvSpPr/>
+          <p:nvPr/>
+        </p:nvSpPr>
+        <p:spPr>
+          <a:xfrm>
+            <a:off x="1449324" y="3982212"/>
+            <a:ext cx="219456" cy="219456"/>
+          </a:xfrm>
+          <a:prstGeom prst="sun">
+            <a:avLst/>
+          </a:prstGeom>
+          <a:solidFill>
+            <a:srgbClr val="FACC15"/>
+          </a:solidFill>
+          <a:ln w="12700">
+            <a:solidFill>
+              <a:srgbClr val="FACC15">
+                <a:alpha val="0"/>
+              </a:srgbClr>
+            </a:solidFill>
+            <a:prstDash val="solid"/>
+          </a:ln>
+        </p:spPr>
+      </p:sp>
+      <p:sp>
+        <p:nvSpPr>
+          <p:cNvPr id="47" name="Shape 45"/>
+          <p:cNvSpPr/>
+          <p:nvPr/>
+        </p:nvSpPr>
+        <p:spPr>
+          <a:xfrm>
+            <a:off x="749808" y="5166360"/>
+            <a:ext cx="685800" cy="274320"/>
+          </a:xfrm>
+          <a:prstGeom prst="roundRect">
+            <a:avLst>
+              <a:gd name="adj" fmla="val 13333"/>
+            </a:avLst>
+          </a:prstGeom>
+          <a:solidFill>
+            <a:srgbClr val="FFFFFF"/>
+          </a:solidFill>
+          <a:ln w="15240">
+            <a:solidFill>
+              <a:srgbClr val="0969DA"/>
+            </a:solidFill>
+            <a:prstDash val="solid"/>
+          </a:ln>
+        </p:spPr>
+      </p:sp>
+      <p:sp>
+        <p:nvSpPr>
+          <p:cNvPr id="48" name="Text 46"/>
+          <p:cNvSpPr/>
+          <p:nvPr/>
+        </p:nvSpPr>
+        <p:spPr>
+          <a:xfrm>
+            <a:off x="822960" y="5230368"/>
+            <a:ext cx="539496" cy="146304"/>
           </a:xfrm>
           <a:prstGeom prst="rect">
             <a:avLst/>
@@ -1596,58 +2202,56 @@
               <a:buNone/>
             </a:pPr>
             <a:r>
-              <a:rPr lang="en-US" sz="850" dirty="0">
+              <a:rPr lang="en-US" sz="750" b="1" dirty="0">
                 <a:solidFill>
-                  <a:srgbClr val="15202B"/>
+                  <a:srgbClr val="0969DA"/>
                 </a:solidFill>
                 <a:latin typeface="Liberation Sans" pitchFamily="34" charset="0"/>
                 <a:ea typeface="Liberation Sans" pitchFamily="34" charset="-122"/>
                 <a:cs typeface="Liberation Sans" pitchFamily="34" charset="-120"/>
               </a:rPr>
-              <a:t>Two boundary sources encode x and y; their hidden crossing coordinate is classified by a locked teacher field.</a:t>
+              <a:t>source</a:t>
             </a:r>
-            <a:endParaRPr lang="en-US" sz="850" dirty="0"/>
+            <a:endParaRPr lang="en-US" sz="750" dirty="0"/>
           </a:p>
         </p:txBody>
       </p:sp>
       <p:sp>
         <p:nvSpPr>
-          <p:cNvPr id="24" name="Shape 21"/>
-          <p:cNvSpPr/>
-          <p:nvPr/>
-        </p:nvSpPr>
-        <p:spPr>
-          <a:xfrm>
-            <a:off x="658368" y="5769864"/>
-            <a:ext cx="685800" cy="228600"/>
+          <p:cNvPr id="49" name="Shape 47"/>
+          <p:cNvSpPr/>
+          <p:nvPr/>
+        </p:nvSpPr>
+        <p:spPr>
+          <a:xfrm>
+            <a:off x="1591056" y="5166360"/>
+            <a:ext cx="685800" cy="274320"/>
           </a:xfrm>
           <a:prstGeom prst="roundRect">
             <a:avLst>
-              <a:gd name="adj" fmla="val 16000"/>
+              <a:gd name="adj" fmla="val 13333"/>
             </a:avLst>
           </a:prstGeom>
           <a:solidFill>
             <a:srgbClr val="FFFFFF"/>
           </a:solidFill>
-          <a:ln w="10160">
-            <a:solidFill>
-              <a:srgbClr val="0969DA">
-                <a:alpha val="82000"/>
-              </a:srgbClr>
-            </a:solidFill>
-            <a:prstDash val="solid"/>
-          </a:ln>
-        </p:spPr>
-      </p:sp>
-      <p:sp>
-        <p:nvSpPr>
-          <p:cNvPr id="25" name="Text 22"/>
-          <p:cNvSpPr/>
-          <p:nvPr/>
-        </p:nvSpPr>
-        <p:spPr>
-          <a:xfrm>
-            <a:off x="731520" y="5801868"/>
+          <a:ln w="15240">
+            <a:solidFill>
+              <a:srgbClr val="FF7A1A"/>
+            </a:solidFill>
+            <a:prstDash val="solid"/>
+          </a:ln>
+        </p:spPr>
+      </p:sp>
+      <p:sp>
+        <p:nvSpPr>
+          <p:cNvPr id="50" name="Text 48"/>
+          <p:cNvSpPr/>
+          <p:nvPr/>
+        </p:nvSpPr>
+        <p:spPr>
+          <a:xfrm>
+            <a:off x="1664208" y="5230368"/>
             <a:ext cx="539496" cy="146304"/>
           </a:xfrm>
           <a:prstGeom prst="rect">
@@ -1664,59 +2268,57 @@
               <a:buNone/>
             </a:pPr>
             <a:r>
-              <a:rPr lang="en-US" sz="710" b="1" dirty="0">
+              <a:rPr lang="en-US" sz="750" b="1" dirty="0">
                 <a:solidFill>
-                  <a:srgbClr val="0969DA"/>
+                  <a:srgbClr val="FF7A1A"/>
                 </a:solidFill>
                 <a:latin typeface="Liberation Sans" pitchFamily="34" charset="0"/>
                 <a:ea typeface="Liberation Sans" pitchFamily="34" charset="-122"/>
                 <a:cs typeface="Liberation Sans" pitchFamily="34" charset="-120"/>
               </a:rPr>
-              <a:t>source L</a:t>
+              <a:t>signal</a:t>
             </a:r>
-            <a:endParaRPr lang="en-US" sz="710" dirty="0"/>
+            <a:endParaRPr lang="en-US" sz="750" dirty="0"/>
           </a:p>
         </p:txBody>
       </p:sp>
       <p:sp>
         <p:nvSpPr>
-          <p:cNvPr id="26" name="Shape 23"/>
-          <p:cNvSpPr/>
-          <p:nvPr/>
-        </p:nvSpPr>
-        <p:spPr>
-          <a:xfrm>
-            <a:off x="1426464" y="5769864"/>
-            <a:ext cx="685800" cy="228600"/>
+          <p:cNvPr id="51" name="Shape 49"/>
+          <p:cNvSpPr/>
+          <p:nvPr/>
+        </p:nvSpPr>
+        <p:spPr>
+          <a:xfrm>
+            <a:off x="2414016" y="5166360"/>
+            <a:ext cx="502920" cy="274320"/>
           </a:xfrm>
           <a:prstGeom prst="roundRect">
             <a:avLst>
-              <a:gd name="adj" fmla="val 16000"/>
+              <a:gd name="adj" fmla="val 13333"/>
             </a:avLst>
           </a:prstGeom>
           <a:solidFill>
             <a:srgbClr val="FFFFFF"/>
           </a:solidFill>
-          <a:ln w="10160">
-            <a:solidFill>
-              <a:srgbClr val="FF7A1A">
-                <a:alpha val="82000"/>
-              </a:srgbClr>
-            </a:solidFill>
-            <a:prstDash val="solid"/>
-          </a:ln>
-        </p:spPr>
-      </p:sp>
-      <p:sp>
-        <p:nvSpPr>
-          <p:cNvPr id="27" name="Text 24"/>
-          <p:cNvSpPr/>
-          <p:nvPr/>
-        </p:nvSpPr>
-        <p:spPr>
-          <a:xfrm>
-            <a:off x="1499616" y="5801868"/>
-            <a:ext cx="539496" cy="146304"/>
+          <a:ln w="15240">
+            <a:solidFill>
+              <a:srgbClr val="6F42C1"/>
+            </a:solidFill>
+            <a:prstDash val="solid"/>
+          </a:ln>
+        </p:spPr>
+      </p:sp>
+      <p:sp>
+        <p:nvSpPr>
+          <p:cNvPr id="52" name="Text 50"/>
+          <p:cNvSpPr/>
+          <p:nvPr/>
+        </p:nvSpPr>
+        <p:spPr>
+          <a:xfrm>
+            <a:off x="2487168" y="5230368"/>
+            <a:ext cx="356616" cy="146304"/>
           </a:xfrm>
           <a:prstGeom prst="rect">
             <a:avLst/>
@@ -1732,75 +2334,7 @@
               <a:buNone/>
             </a:pPr>
             <a:r>
-              <a:rPr lang="en-US" sz="710" b="1" dirty="0">
-                <a:solidFill>
-                  <a:srgbClr val="FF7A1A"/>
-                </a:solidFill>
-                <a:latin typeface="Liberation Sans" pitchFamily="34" charset="0"/>
-                <a:ea typeface="Liberation Sans" pitchFamily="34" charset="-122"/>
-                <a:cs typeface="Liberation Sans" pitchFamily="34" charset="-120"/>
-              </a:rPr>
-              <a:t>source B</a:t>
-            </a:r>
-            <a:endParaRPr lang="en-US" sz="710" dirty="0"/>
-          </a:p>
-        </p:txBody>
-      </p:sp>
-      <p:sp>
-        <p:nvSpPr>
-          <p:cNvPr id="28" name="Shape 25"/>
-          <p:cNvSpPr/>
-          <p:nvPr/>
-        </p:nvSpPr>
-        <p:spPr>
-          <a:xfrm>
-            <a:off x="2194560" y="5769864"/>
-            <a:ext cx="530352" cy="228600"/>
-          </a:xfrm>
-          <a:prstGeom prst="roundRect">
-            <a:avLst>
-              <a:gd name="adj" fmla="val 16000"/>
-            </a:avLst>
-          </a:prstGeom>
-          <a:solidFill>
-            <a:srgbClr val="FFFFFF"/>
-          </a:solidFill>
-          <a:ln w="10160">
-            <a:solidFill>
-              <a:srgbClr val="6F42C1">
-                <a:alpha val="82000"/>
-              </a:srgbClr>
-            </a:solidFill>
-            <a:prstDash val="solid"/>
-          </a:ln>
-        </p:spPr>
-      </p:sp>
-      <p:sp>
-        <p:nvSpPr>
-          <p:cNvPr id="29" name="Text 26"/>
-          <p:cNvSpPr/>
-          <p:nvPr/>
-        </p:nvSpPr>
-        <p:spPr>
-          <a:xfrm>
-            <a:off x="2267712" y="5801868"/>
-            <a:ext cx="384048" cy="146304"/>
-          </a:xfrm>
-          <a:prstGeom prst="rect">
-            <a:avLst/>
-          </a:prstGeom>
-          <a:noFill/>
-          <a:ln/>
-        </p:spPr>
-        <p:txBody>
-          <a:bodyPr wrap="square" lIns="0" tIns="0" rIns="0" bIns="0" rtlCol="0" anchor="ctr"/>
-          <a:lstStyle/>
-          <a:p>
-            <a:pPr algn="ctr" indent="0" marL="0">
-              <a:buNone/>
-            </a:pPr>
-            <a:r>
-              <a:rPr lang="en-US" sz="710" b="1" dirty="0">
+              <a:rPr lang="en-US" sz="750" b="1" dirty="0">
                 <a:solidFill>
                   <a:srgbClr val="6F42C1"/>
                 </a:solidFill>
@@ -1808,98 +2342,22 @@
                 <a:ea typeface="Liberation Sans" pitchFamily="34" charset="-122"/>
                 <a:cs typeface="Liberation Sans" pitchFamily="34" charset="-120"/>
               </a:rPr>
-              <a:t>c=(x,y)</a:t>
+              <a:t>read</a:t>
             </a:r>
-            <a:endParaRPr lang="en-US" sz="710" dirty="0"/>
+            <a:endParaRPr lang="en-US" sz="750" dirty="0"/>
           </a:p>
         </p:txBody>
       </p:sp>
-      <p:pic>
-        <p:nvPicPr>
-          <p:cNvPr id="30" name="Image 1" descr="/tmp/ttn_ppt_design/assets/medium_focus.png">    </p:cNvPr>
-          <p:cNvPicPr>
-            <a:picLocks noChangeAspect="1"/>
-          </p:cNvPicPr>
-          <p:nvPr/>
-        </p:nvPicPr>
-        <p:blipFill>
-          <a:blip r:embed="rId2"/>
-          <a:stretch>
-            <a:fillRect/>
-          </a:stretch>
-        </p:blipFill>
-        <p:spPr>
-          <a:xfrm>
-            <a:off x="3511296" y="2000329"/>
-            <a:ext cx="1755648" cy="3168238"/>
-          </a:xfrm>
-          <a:prstGeom prst="rect">
-            <a:avLst/>
-          </a:prstGeom>
-        </p:spPr>
-      </p:pic>
-      <p:sp>
-        <p:nvSpPr>
-          <p:cNvPr id="31" name="Shape 27"/>
-          <p:cNvSpPr/>
-          <p:nvPr/>
-        </p:nvSpPr>
-        <p:spPr>
-          <a:xfrm>
-            <a:off x="5321808" y="3374136"/>
-            <a:ext cx="310896" cy="0"/>
-          </a:xfrm>
-          <a:prstGeom prst="line">
-            <a:avLst/>
-          </a:prstGeom>
-          <a:noFill/>
-          <a:ln w="27940">
-            <a:solidFill>
-              <a:srgbClr val="FF7A1A"/>
-            </a:solidFill>
-            <a:prstDash val="solid"/>
-            <a:headEnd type="none"/>
-            <a:tailEnd type="triangle"/>
-          </a:ln>
-        </p:spPr>
-      </p:sp>
-      <p:sp>
-        <p:nvSpPr>
-          <p:cNvPr id="32" name="Shape 28"/>
-          <p:cNvSpPr/>
-          <p:nvPr/>
-        </p:nvSpPr>
-        <p:spPr>
-          <a:xfrm>
-            <a:off x="5687568" y="1847088"/>
-            <a:ext cx="1060704" cy="621792"/>
-          </a:xfrm>
-          <a:prstGeom prst="roundRect">
-            <a:avLst>
-              <a:gd name="adj" fmla="val 5882"/>
-            </a:avLst>
-          </a:prstGeom>
-          <a:solidFill>
-            <a:srgbClr val="FFF3E8"/>
-          </a:solidFill>
-          <a:ln w="8890">
-            <a:solidFill>
-              <a:srgbClr val="FF7A1A"/>
-            </a:solidFill>
-            <a:prstDash val="solid"/>
-          </a:ln>
-        </p:spPr>
-      </p:sp>
-      <p:sp>
-        <p:nvSpPr>
-          <p:cNvPr id="33" name="Text 29"/>
-          <p:cNvSpPr/>
-          <p:nvPr/>
-        </p:nvSpPr>
-        <p:spPr>
-          <a:xfrm>
-            <a:off x="5797296" y="1993392"/>
-            <a:ext cx="841248" cy="164592"/>
+      <p:sp>
+        <p:nvSpPr>
+          <p:cNvPr id="53" name="Text 51"/>
+          <p:cNvSpPr/>
+          <p:nvPr/>
+        </p:nvSpPr>
+        <p:spPr>
+          <a:xfrm>
+            <a:off x="758952" y="4727448"/>
+            <a:ext cx="2148840" cy="274320"/>
           </a:xfrm>
           <a:prstGeom prst="rect">
             <a:avLst/>
@@ -1912,784 +2370,6 @@
           <a:lstStyle/>
           <a:p>
             <a:pPr algn="ctr" indent="0" marL="0">
-              <a:buNone/>
-            </a:pPr>
-            <a:r>
-              <a:rPr lang="en-US" sz="950" b="1" dirty="0">
-                <a:solidFill>
-                  <a:srgbClr val="FF7A1A"/>
-                </a:solidFill>
-                <a:latin typeface="Liberation Sans" pitchFamily="34" charset="0"/>
-                <a:ea typeface="Liberation Sans" pitchFamily="34" charset="-122"/>
-                <a:cs typeface="Liberation Sans" pitchFamily="34" charset="-120"/>
-              </a:rPr>
-              <a:t>kx, ky, mu</a:t>
-            </a:r>
-            <a:endParaRPr lang="en-US" sz="950" dirty="0"/>
-          </a:p>
-        </p:txBody>
-      </p:sp>
-      <p:sp>
-        <p:nvSpPr>
-          <p:cNvPr id="34" name="Shape 30"/>
-          <p:cNvSpPr/>
-          <p:nvPr/>
-        </p:nvSpPr>
-        <p:spPr>
-          <a:xfrm>
-            <a:off x="5687568" y="2633472"/>
-            <a:ext cx="1060704" cy="621792"/>
-          </a:xfrm>
-          <a:prstGeom prst="roundRect">
-            <a:avLst>
-              <a:gd name="adj" fmla="val 5882"/>
-            </a:avLst>
-          </a:prstGeom>
-          <a:solidFill>
-            <a:srgbClr val="EDF7FF"/>
-          </a:solidFill>
-          <a:ln w="8890">
-            <a:solidFill>
-              <a:srgbClr val="0969DA"/>
-            </a:solidFill>
-            <a:prstDash val="solid"/>
-          </a:ln>
-        </p:spPr>
-      </p:sp>
-      <p:sp>
-        <p:nvSpPr>
-          <p:cNvPr id="35" name="Text 31"/>
-          <p:cNvSpPr/>
-          <p:nvPr/>
-        </p:nvSpPr>
-        <p:spPr>
-          <a:xfrm>
-            <a:off x="5769864" y="2788920"/>
-            <a:ext cx="896112" cy="164592"/>
-          </a:xfrm>
-          <a:prstGeom prst="rect">
-            <a:avLst/>
-          </a:prstGeom>
-          <a:noFill/>
-          <a:ln/>
-        </p:spPr>
-        <p:txBody>
-          <a:bodyPr wrap="square" lIns="0" tIns="0" rIns="0" bIns="0" rtlCol="0" anchor="ctr"/>
-          <a:lstStyle/>
-          <a:p>
-            <a:pPr algn="ctr" indent="0" marL="0">
-              <a:buNone/>
-            </a:pPr>
-            <a:r>
-              <a:rPr lang="en-US" sz="930" b="1" dirty="0">
-                <a:solidFill>
-                  <a:srgbClr val="0969DA"/>
-                </a:solidFill>
-                <a:latin typeface="Liberation Sans" pitchFamily="34" charset="0"/>
-                <a:ea typeface="Liberation Sans" pitchFamily="34" charset="-122"/>
-                <a:cs typeface="Liberation Sans" pitchFamily="34" charset="-120"/>
-              </a:rPr>
-              <a:t>fixed steps</a:t>
-            </a:r>
-            <a:endParaRPr lang="en-US" sz="930" dirty="0"/>
-          </a:p>
-        </p:txBody>
-      </p:sp>
-      <p:sp>
-        <p:nvSpPr>
-          <p:cNvPr id="36" name="Shape 32"/>
-          <p:cNvSpPr/>
-          <p:nvPr/>
-        </p:nvSpPr>
-        <p:spPr>
-          <a:xfrm>
-            <a:off x="5687568" y="3419856"/>
-            <a:ext cx="1060704" cy="621792"/>
-          </a:xfrm>
-          <a:prstGeom prst="roundRect">
-            <a:avLst>
-              <a:gd name="adj" fmla="val 5882"/>
-            </a:avLst>
-          </a:prstGeom>
-          <a:solidFill>
-            <a:srgbClr val="F4EDFF"/>
-          </a:solidFill>
-          <a:ln w="8890">
-            <a:solidFill>
-              <a:srgbClr val="6F42C1"/>
-            </a:solidFill>
-            <a:prstDash val="solid"/>
-          </a:ln>
-        </p:spPr>
-      </p:sp>
-      <p:sp>
-        <p:nvSpPr>
-          <p:cNvPr id="37" name="Text 33"/>
-          <p:cNvSpPr/>
-          <p:nvPr/>
-        </p:nvSpPr>
-        <p:spPr>
-          <a:xfrm>
-            <a:off x="5769864" y="3566160"/>
-            <a:ext cx="896112" cy="164592"/>
-          </a:xfrm>
-          <a:prstGeom prst="rect">
-            <a:avLst/>
-          </a:prstGeom>
-          <a:noFill/>
-          <a:ln/>
-        </p:spPr>
-        <p:txBody>
-          <a:bodyPr wrap="square" lIns="0" tIns="0" rIns="0" bIns="0" rtlCol="0" anchor="ctr"/>
-          <a:lstStyle/>
-          <a:p>
-            <a:pPr algn="ctr" indent="0" marL="0">
-              <a:buNone/>
-            </a:pPr>
-            <a:r>
-              <a:rPr lang="en-US" sz="880" b="1" dirty="0">
-                <a:solidFill>
-                  <a:srgbClr val="6F42C1"/>
-                </a:solidFill>
-                <a:latin typeface="Liberation Sans" pitchFamily="34" charset="0"/>
-                <a:ea typeface="Liberation Sans" pitchFamily="34" charset="-122"/>
-                <a:cs typeface="Liberation Sans" pitchFamily="34" charset="-120"/>
-              </a:rPr>
-              <a:t>m = uL*uB</a:t>
-            </a:r>
-            <a:endParaRPr lang="en-US" sz="880" dirty="0"/>
-          </a:p>
-        </p:txBody>
-      </p:sp>
-      <p:sp>
-        <p:nvSpPr>
-          <p:cNvPr id="38" name="Shape 34"/>
-          <p:cNvSpPr/>
-          <p:nvPr/>
-        </p:nvSpPr>
-        <p:spPr>
-          <a:xfrm>
-            <a:off x="5687568" y="4206240"/>
-            <a:ext cx="1060704" cy="621792"/>
-          </a:xfrm>
-          <a:prstGeom prst="roundRect">
-            <a:avLst>
-              <a:gd name="adj" fmla="val 5882"/>
-            </a:avLst>
-          </a:prstGeom>
-          <a:solidFill>
-            <a:srgbClr val="EFFFF8"/>
-          </a:solidFill>
-          <a:ln w="8890">
-            <a:solidFill>
-              <a:srgbClr val="009E73"/>
-            </a:solidFill>
-            <a:prstDash val="solid"/>
-          </a:ln>
-        </p:spPr>
-      </p:sp>
-      <p:sp>
-        <p:nvSpPr>
-          <p:cNvPr id="39" name="Text 35"/>
-          <p:cNvSpPr/>
-          <p:nvPr/>
-        </p:nvSpPr>
-        <p:spPr>
-          <a:xfrm>
-            <a:off x="5879592" y="4370832"/>
-            <a:ext cx="667512" cy="164592"/>
-          </a:xfrm>
-          <a:prstGeom prst="rect">
-            <a:avLst/>
-          </a:prstGeom>
-          <a:noFill/>
-          <a:ln/>
-        </p:spPr>
-        <p:txBody>
-          <a:bodyPr wrap="square" lIns="0" tIns="0" rIns="0" bIns="0" rtlCol="0" anchor="ctr"/>
-          <a:lstStyle/>
-          <a:p>
-            <a:pPr algn="ctr" indent="0" marL="0">
-              <a:buNone/>
-            </a:pPr>
-            <a:r>
-              <a:rPr lang="en-US" sz="970" b="1" dirty="0">
-                <a:solidFill>
-                  <a:srgbClr val="009E73"/>
-                </a:solidFill>
-                <a:latin typeface="Liberation Sans" pitchFamily="34" charset="0"/>
-                <a:ea typeface="Liberation Sans" pitchFamily="34" charset="-122"/>
-                <a:cs typeface="Liberation Sans" pitchFamily="34" charset="-120"/>
-              </a:rPr>
-              <a:t>logits</a:t>
-            </a:r>
-            <a:endParaRPr lang="en-US" sz="970" dirty="0"/>
-          </a:p>
-        </p:txBody>
-      </p:sp>
-      <p:sp>
-        <p:nvSpPr>
-          <p:cNvPr id="40" name="Text 36"/>
-          <p:cNvSpPr/>
-          <p:nvPr/>
-        </p:nvSpPr>
-        <p:spPr>
-          <a:xfrm>
-            <a:off x="3657600" y="5468112"/>
-            <a:ext cx="3054096" cy="493776"/>
-          </a:xfrm>
-          <a:prstGeom prst="rect">
-            <a:avLst/>
-          </a:prstGeom>
-          <a:noFill/>
-          <a:ln/>
-        </p:spPr>
-        <p:txBody>
-          <a:bodyPr wrap="square" lIns="0" tIns="0" rIns="0" bIns="0" rtlCol="0" anchor="ctr"/>
-          <a:lstStyle/>
-          <a:p>
-            <a:pPr algn="ctr" indent="0" marL="0">
-              <a:buNone/>
-            </a:pPr>
-            <a:r>
-              <a:rPr lang="en-US" sz="840" dirty="0">
-                <a:solidFill>
-                  <a:srgbClr val="15202B"/>
-                </a:solidFill>
-                <a:latin typeface="Liberation Sans" pitchFamily="34" charset="0"/>
-                <a:ea typeface="Liberation Sans" pitchFamily="34" charset="-122"/>
-                <a:cs typeface="Liberation Sans" pitchFamily="34" charset="-120"/>
-              </a:rPr>
-              <a:t>Finite relaxation, not a fully converged elliptic solver: the learned fields are visualizable, perturbable, and transferable across grids.</a:t>
-            </a:r>
-            <a:endParaRPr lang="en-US" sz="840" dirty="0"/>
-          </a:p>
-        </p:txBody>
-      </p:sp>
-      <p:pic>
-        <p:nvPicPr>
-          <p:cNvPr id="41" name="Image 2" descr="/tmp/ttn_ppt_design/assets/resolution_transfer.png">    </p:cNvPr>
-          <p:cNvPicPr>
-            <a:picLocks noChangeAspect="1"/>
-          </p:cNvPicPr>
-          <p:nvPr/>
-        </p:nvPicPr>
-        <p:blipFill>
-          <a:blip r:embed="rId3"/>
-          <a:stretch>
-            <a:fillRect/>
-          </a:stretch>
-        </p:blipFill>
-        <p:spPr>
-          <a:xfrm>
-            <a:off x="7433701" y="1764792"/>
-            <a:ext cx="4142973" cy="2322576"/>
-          </a:xfrm>
-          <a:prstGeom prst="rect">
-            <a:avLst/>
-          </a:prstGeom>
-        </p:spPr>
-      </p:pic>
-      <p:sp>
-        <p:nvSpPr>
-          <p:cNvPr id="42" name="Shape 37"/>
-          <p:cNvSpPr/>
-          <p:nvPr/>
-        </p:nvSpPr>
-        <p:spPr>
-          <a:xfrm>
-            <a:off x="7516368" y="4334256"/>
-            <a:ext cx="987552" cy="676656"/>
-          </a:xfrm>
-          <a:prstGeom prst="roundRect">
-            <a:avLst>
-              <a:gd name="adj" fmla="val 6757"/>
-            </a:avLst>
-          </a:prstGeom>
-          <a:solidFill>
-            <a:srgbClr val="FFFFFF"/>
-          </a:solidFill>
-          <a:ln w="12700">
-            <a:solidFill>
-              <a:srgbClr val="0969DA">
-                <a:alpha val="92000"/>
-              </a:srgbClr>
-            </a:solidFill>
-            <a:prstDash val="solid"/>
-          </a:ln>
-        </p:spPr>
-      </p:sp>
-      <p:sp>
-        <p:nvSpPr>
-          <p:cNvPr id="43" name="Text 38"/>
-          <p:cNvSpPr/>
-          <p:nvPr/>
-        </p:nvSpPr>
-        <p:spPr>
-          <a:xfrm>
-            <a:off x="7635240" y="4425696"/>
-            <a:ext cx="749808" cy="304495"/>
-          </a:xfrm>
-          <a:prstGeom prst="rect">
-            <a:avLst/>
-          </a:prstGeom>
-          <a:noFill/>
-          <a:ln/>
-        </p:spPr>
-        <p:txBody>
-          <a:bodyPr wrap="square" lIns="0" tIns="0" rIns="0" bIns="0" rtlCol="0" anchor="ctr"/>
-          <a:lstStyle/>
-          <a:p>
-            <a:pPr algn="ctr" indent="0" marL="0">
-              <a:buNone/>
-            </a:pPr>
-            <a:r>
-              <a:rPr lang="en-US" sz="1500" b="1" dirty="0">
-                <a:solidFill>
-                  <a:srgbClr val="0969DA"/>
-                </a:solidFill>
-                <a:latin typeface="Liberation Sans" pitchFamily="34" charset="0"/>
-                <a:ea typeface="Liberation Sans" pitchFamily="34" charset="-122"/>
-                <a:cs typeface="Liberation Sans" pitchFamily="34" charset="-120"/>
-              </a:rPr>
-              <a:t>96.13%</a:t>
-            </a:r>
-            <a:endParaRPr lang="en-US" sz="1500" dirty="0"/>
-          </a:p>
-        </p:txBody>
-      </p:sp>
-      <p:sp>
-        <p:nvSpPr>
-          <p:cNvPr id="44" name="Text 39"/>
-          <p:cNvSpPr/>
-          <p:nvPr/>
-        </p:nvSpPr>
-        <p:spPr>
-          <a:xfrm>
-            <a:off x="7626096" y="4767316"/>
-            <a:ext cx="768096" cy="162397"/>
-          </a:xfrm>
-          <a:prstGeom prst="rect">
-            <a:avLst/>
-          </a:prstGeom>
-          <a:noFill/>
-          <a:ln/>
-        </p:spPr>
-        <p:txBody>
-          <a:bodyPr wrap="square" lIns="0" tIns="0" rIns="0" bIns="0" rtlCol="0" anchor="ctr"/>
-          <a:lstStyle/>
-          <a:p>
-            <a:pPr algn="ctr" indent="0" marL="0">
-              <a:buNone/>
-            </a:pPr>
-            <a:r>
-              <a:rPr lang="en-US" sz="780" dirty="0">
-                <a:solidFill>
-                  <a:srgbClr val="657184"/>
-                </a:solidFill>
-                <a:latin typeface="Liberation Sans" pitchFamily="34" charset="0"/>
-                <a:ea typeface="Liberation Sans" pitchFamily="34" charset="-122"/>
-                <a:cs typeface="Liberation Sans" pitchFamily="34" charset="-120"/>
-              </a:rPr>
-              <a:t>32x32 test</a:t>
-            </a:r>
-            <a:endParaRPr lang="en-US" sz="780" dirty="0"/>
-          </a:p>
-        </p:txBody>
-      </p:sp>
-      <p:sp>
-        <p:nvSpPr>
-          <p:cNvPr id="45" name="Shape 40"/>
-          <p:cNvSpPr/>
-          <p:nvPr/>
-        </p:nvSpPr>
-        <p:spPr>
-          <a:xfrm>
-            <a:off x="8622792" y="4334256"/>
-            <a:ext cx="987552" cy="676656"/>
-          </a:xfrm>
-          <a:prstGeom prst="roundRect">
-            <a:avLst>
-              <a:gd name="adj" fmla="val 6757"/>
-            </a:avLst>
-          </a:prstGeom>
-          <a:solidFill>
-            <a:srgbClr val="FFFFFF"/>
-          </a:solidFill>
-          <a:ln w="12700">
-            <a:solidFill>
-              <a:srgbClr val="0969DA">
-                <a:alpha val="92000"/>
-              </a:srgbClr>
-            </a:solidFill>
-            <a:prstDash val="solid"/>
-          </a:ln>
-        </p:spPr>
-      </p:sp>
-      <p:sp>
-        <p:nvSpPr>
-          <p:cNvPr id="46" name="Text 41"/>
-          <p:cNvSpPr/>
-          <p:nvPr/>
-        </p:nvSpPr>
-        <p:spPr>
-          <a:xfrm>
-            <a:off x="8741664" y="4425696"/>
-            <a:ext cx="749808" cy="304495"/>
-          </a:xfrm>
-          <a:prstGeom prst="rect">
-            <a:avLst/>
-          </a:prstGeom>
-          <a:noFill/>
-          <a:ln/>
-        </p:spPr>
-        <p:txBody>
-          <a:bodyPr wrap="square" lIns="0" tIns="0" rIns="0" bIns="0" rtlCol="0" anchor="ctr"/>
-          <a:lstStyle/>
-          <a:p>
-            <a:pPr algn="ctr" indent="0" marL="0">
-              <a:buNone/>
-            </a:pPr>
-            <a:r>
-              <a:rPr lang="en-US" sz="1500" b="1" dirty="0">
-                <a:solidFill>
-                  <a:srgbClr val="0969DA"/>
-                </a:solidFill>
-                <a:latin typeface="Liberation Sans" pitchFamily="34" charset="0"/>
-                <a:ea typeface="Liberation Sans" pitchFamily="34" charset="-122"/>
-                <a:cs typeface="Liberation Sans" pitchFamily="34" charset="-120"/>
-              </a:rPr>
-              <a:t>96.00%</a:t>
-            </a:r>
-            <a:endParaRPr lang="en-US" sz="1500" dirty="0"/>
-          </a:p>
-        </p:txBody>
-      </p:sp>
-      <p:sp>
-        <p:nvSpPr>
-          <p:cNvPr id="47" name="Text 42"/>
-          <p:cNvSpPr/>
-          <p:nvPr/>
-        </p:nvSpPr>
-        <p:spPr>
-          <a:xfrm>
-            <a:off x="8732520" y="4767316"/>
-            <a:ext cx="768096" cy="162397"/>
-          </a:xfrm>
-          <a:prstGeom prst="rect">
-            <a:avLst/>
-          </a:prstGeom>
-          <a:noFill/>
-          <a:ln/>
-        </p:spPr>
-        <p:txBody>
-          <a:bodyPr wrap="square" lIns="0" tIns="0" rIns="0" bIns="0" rtlCol="0" anchor="ctr"/>
-          <a:lstStyle/>
-          <a:p>
-            <a:pPr algn="ctr" indent="0" marL="0">
-              <a:buNone/>
-            </a:pPr>
-            <a:r>
-              <a:rPr lang="en-US" sz="780" dirty="0">
-                <a:solidFill>
-                  <a:srgbClr val="657184"/>
-                </a:solidFill>
-                <a:latin typeface="Liberation Sans" pitchFamily="34" charset="0"/>
-                <a:ea typeface="Liberation Sans" pitchFamily="34" charset="-122"/>
-                <a:cs typeface="Liberation Sans" pitchFamily="34" charset="-120"/>
-              </a:rPr>
-              <a:t>128x128 audit</a:t>
-            </a:r>
-            <a:endParaRPr lang="en-US" sz="780" dirty="0"/>
-          </a:p>
-        </p:txBody>
-      </p:sp>
-      <p:sp>
-        <p:nvSpPr>
-          <p:cNvPr id="48" name="Shape 43"/>
-          <p:cNvSpPr/>
-          <p:nvPr/>
-        </p:nvSpPr>
-        <p:spPr>
-          <a:xfrm>
-            <a:off x="9729216" y="4334256"/>
-            <a:ext cx="987552" cy="676656"/>
-          </a:xfrm>
-          <a:prstGeom prst="roundRect">
-            <a:avLst>
-              <a:gd name="adj" fmla="val 6757"/>
-            </a:avLst>
-          </a:prstGeom>
-          <a:solidFill>
-            <a:srgbClr val="FFFFFF"/>
-          </a:solidFill>
-          <a:ln w="12700">
-            <a:solidFill>
-              <a:srgbClr val="FF7A1A">
-                <a:alpha val="92000"/>
-              </a:srgbClr>
-            </a:solidFill>
-            <a:prstDash val="solid"/>
-          </a:ln>
-        </p:spPr>
-      </p:sp>
-      <p:sp>
-        <p:nvSpPr>
-          <p:cNvPr id="49" name="Text 44"/>
-          <p:cNvSpPr/>
-          <p:nvPr/>
-        </p:nvSpPr>
-        <p:spPr>
-          <a:xfrm>
-            <a:off x="9848088" y="4425696"/>
-            <a:ext cx="749808" cy="304495"/>
-          </a:xfrm>
-          <a:prstGeom prst="rect">
-            <a:avLst/>
-          </a:prstGeom>
-          <a:noFill/>
-          <a:ln/>
-        </p:spPr>
-        <p:txBody>
-          <a:bodyPr wrap="square" lIns="0" tIns="0" rIns="0" bIns="0" rtlCol="0" anchor="ctr"/>
-          <a:lstStyle/>
-          <a:p>
-            <a:pPr algn="ctr" indent="0" marL="0">
-              <a:buNone/>
-            </a:pPr>
-            <a:r>
-              <a:rPr lang="en-US" sz="1500" b="1" dirty="0">
-                <a:solidFill>
-                  <a:srgbClr val="FF7A1A"/>
-                </a:solidFill>
-                <a:latin typeface="Liberation Sans" pitchFamily="34" charset="0"/>
-                <a:ea typeface="Liberation Sans" pitchFamily="34" charset="-122"/>
-                <a:cs typeface="Liberation Sans" pitchFamily="34" charset="-120"/>
-              </a:rPr>
-              <a:t>37.16%</a:t>
-            </a:r>
-            <a:endParaRPr lang="en-US" sz="1500" dirty="0"/>
-          </a:p>
-        </p:txBody>
-      </p:sp>
-      <p:sp>
-        <p:nvSpPr>
-          <p:cNvPr id="50" name="Text 45"/>
-          <p:cNvSpPr/>
-          <p:nvPr/>
-        </p:nvSpPr>
-        <p:spPr>
-          <a:xfrm>
-            <a:off x="9838944" y="4767316"/>
-            <a:ext cx="768096" cy="162397"/>
-          </a:xfrm>
-          <a:prstGeom prst="rect">
-            <a:avLst/>
-          </a:prstGeom>
-          <a:noFill/>
-          <a:ln/>
-        </p:spPr>
-        <p:txBody>
-          <a:bodyPr wrap="square" lIns="0" tIns="0" rIns="0" bIns="0" rtlCol="0" anchor="ctr"/>
-          <a:lstStyle/>
-          <a:p>
-            <a:pPr algn="ctr" indent="0" marL="0">
-              <a:buNone/>
-            </a:pPr>
-            <a:r>
-              <a:rPr lang="en-US" sz="780" dirty="0">
-                <a:solidFill>
-                  <a:srgbClr val="657184"/>
-                </a:solidFill>
-                <a:latin typeface="Liberation Sans" pitchFamily="34" charset="0"/>
-                <a:ea typeface="Liberation Sans" pitchFamily="34" charset="-122"/>
-                <a:cs typeface="Liberation Sans" pitchFamily="34" charset="-120"/>
-              </a:rPr>
-              <a:t>local-kernel @128</a:t>
-            </a:r>
-            <a:endParaRPr lang="en-US" sz="780" dirty="0"/>
-          </a:p>
-        </p:txBody>
-      </p:sp>
-      <p:sp>
-        <p:nvSpPr>
-          <p:cNvPr id="51" name="Shape 46"/>
-          <p:cNvSpPr/>
-          <p:nvPr/>
-        </p:nvSpPr>
-        <p:spPr>
-          <a:xfrm>
-            <a:off x="10744200" y="4334256"/>
-            <a:ext cx="950976" cy="676656"/>
-          </a:xfrm>
-          <a:prstGeom prst="roundRect">
-            <a:avLst>
-              <a:gd name="adj" fmla="val 6757"/>
-            </a:avLst>
-          </a:prstGeom>
-          <a:solidFill>
-            <a:srgbClr val="FFFFFF"/>
-          </a:solidFill>
-          <a:ln w="12700">
-            <a:solidFill>
-              <a:srgbClr val="2DA44E">
-                <a:alpha val="92000"/>
-              </a:srgbClr>
-            </a:solidFill>
-            <a:prstDash val="solid"/>
-          </a:ln>
-        </p:spPr>
-      </p:sp>
-      <p:sp>
-        <p:nvSpPr>
-          <p:cNvPr id="52" name="Text 47"/>
-          <p:cNvSpPr/>
-          <p:nvPr/>
-        </p:nvSpPr>
-        <p:spPr>
-          <a:xfrm>
-            <a:off x="10863072" y="4425696"/>
-            <a:ext cx="713232" cy="304495"/>
-          </a:xfrm>
-          <a:prstGeom prst="rect">
-            <a:avLst/>
-          </a:prstGeom>
-          <a:noFill/>
-          <a:ln/>
-        </p:spPr>
-        <p:txBody>
-          <a:bodyPr wrap="square" lIns="0" tIns="0" rIns="0" bIns="0" rtlCol="0" anchor="ctr"/>
-          <a:lstStyle/>
-          <a:p>
-            <a:pPr algn="ctr" indent="0" marL="0">
-              <a:buNone/>
-            </a:pPr>
-            <a:r>
-              <a:rPr lang="en-US" sz="1360" b="1" dirty="0">
-                <a:solidFill>
-                  <a:srgbClr val="2DA44E"/>
-                </a:solidFill>
-                <a:latin typeface="Liberation Sans" pitchFamily="34" charset="0"/>
-                <a:ea typeface="Liberation Sans" pitchFamily="34" charset="-122"/>
-                <a:cs typeface="Liberation Sans" pitchFamily="34" charset="-120"/>
-              </a:rPr>
-              <a:t>54.47%</a:t>
-            </a:r>
-            <a:endParaRPr lang="en-US" sz="1360" dirty="0"/>
-          </a:p>
-        </p:txBody>
-      </p:sp>
-      <p:sp>
-        <p:nvSpPr>
-          <p:cNvPr id="53" name="Text 48"/>
-          <p:cNvSpPr/>
-          <p:nvPr/>
-        </p:nvSpPr>
-        <p:spPr>
-          <a:xfrm>
-            <a:off x="10853928" y="4767316"/>
-            <a:ext cx="731520" cy="162397"/>
-          </a:xfrm>
-          <a:prstGeom prst="rect">
-            <a:avLst/>
-          </a:prstGeom>
-          <a:noFill/>
-          <a:ln/>
-        </p:spPr>
-        <p:txBody>
-          <a:bodyPr wrap="square" lIns="0" tIns="0" rIns="0" bIns="0" rtlCol="0" anchor="ctr"/>
-          <a:lstStyle/>
-          <a:p>
-            <a:pPr algn="ctr" indent="0" marL="0">
-              <a:buNone/>
-            </a:pPr>
-            <a:r>
-              <a:rPr lang="en-US" sz="680" dirty="0">
-                <a:solidFill>
-                  <a:srgbClr val="657184"/>
-                </a:solidFill>
-                <a:latin typeface="Liberation Sans" pitchFamily="34" charset="0"/>
-                <a:ea typeface="Liberation Sans" pitchFamily="34" charset="-122"/>
-                <a:cs typeface="Liberation Sans" pitchFamily="34" charset="-120"/>
-              </a:rPr>
-              <a:t>CNN @128</a:t>
-            </a:r>
-            <a:endParaRPr lang="en-US" sz="680" dirty="0"/>
-          </a:p>
-        </p:txBody>
-      </p:sp>
-      <p:sp>
-        <p:nvSpPr>
-          <p:cNvPr id="54" name="Shape 49"/>
-          <p:cNvSpPr/>
-          <p:nvPr/>
-        </p:nvSpPr>
-        <p:spPr>
-          <a:xfrm>
-            <a:off x="7479792" y="5230368"/>
-            <a:ext cx="4023360" cy="0"/>
-          </a:xfrm>
-          <a:prstGeom prst="line">
-            <a:avLst/>
-          </a:prstGeom>
-          <a:noFill/>
-          <a:ln w="12700">
-            <a:solidFill>
-              <a:srgbClr val="D8E1EA"/>
-            </a:solidFill>
-            <a:prstDash val="solid"/>
-          </a:ln>
-        </p:spPr>
-      </p:sp>
-      <p:sp>
-        <p:nvSpPr>
-          <p:cNvPr id="55" name="Shape 50"/>
-          <p:cNvSpPr/>
-          <p:nvPr/>
-        </p:nvSpPr>
-        <p:spPr>
-          <a:xfrm>
-            <a:off x="7516368" y="5477256"/>
-            <a:ext cx="73152" cy="73152"/>
-          </a:xfrm>
-          <a:prstGeom prst="ellipse">
-            <a:avLst/>
-          </a:prstGeom>
-          <a:solidFill>
-            <a:srgbClr val="0969DA"/>
-          </a:solidFill>
-          <a:ln w="12700">
-            <a:solidFill>
-              <a:srgbClr val="0969DA">
-                <a:alpha val="0"/>
-              </a:srgbClr>
-            </a:solidFill>
-            <a:prstDash val="solid"/>
-          </a:ln>
-        </p:spPr>
-      </p:sp>
-      <p:sp>
-        <p:nvSpPr>
-          <p:cNvPr id="56" name="Text 51"/>
-          <p:cNvSpPr/>
-          <p:nvPr/>
-        </p:nvSpPr>
-        <p:spPr>
-          <a:xfrm>
-            <a:off x="7662672" y="5404104"/>
-            <a:ext cx="1591056" cy="265176"/>
-          </a:xfrm>
-          <a:prstGeom prst="rect">
-            <a:avLst/>
-          </a:prstGeom>
-          <a:noFill/>
-          <a:ln/>
-        </p:spPr>
-        <p:txBody>
-          <a:bodyPr wrap="square" lIns="0" tIns="0" rIns="0" bIns="0" rtlCol="0" anchor="ctr"/>
-          <a:lstStyle/>
-          <a:p>
-            <a:pPr algn="l" indent="0" marL="0">
               <a:buNone/>
             </a:pPr>
             <a:r>
@@ -2701,7 +2381,7 @@
                 <a:ea typeface="Liberation Sans" pitchFamily="34" charset="-122"/>
                 <a:cs typeface="Liberation Sans" pitchFamily="34" charset="-120"/>
               </a:rPr>
-              <a:t>resolution transfer: 32 -&gt; 64 -&gt; 128 without retraining</a:t>
+              <a:t>A reference effect image defines layout, style, and reading order.</a:t>
             </a:r>
             <a:endParaRPr lang="en-US" sz="820" dirty="0"/>
           </a:p>
@@ -2709,14 +2389,434 @@
       </p:sp>
       <p:sp>
         <p:nvSpPr>
-          <p:cNvPr id="57" name="Shape 52"/>
-          <p:cNvSpPr/>
-          <p:nvPr/>
-        </p:nvSpPr>
-        <p:spPr>
-          <a:xfrm>
-            <a:off x="9582912" y="5477256"/>
-            <a:ext cx="73152" cy="73152"/>
+          <p:cNvPr id="54" name="Shape 52"/>
+          <p:cNvSpPr/>
+          <p:nvPr/>
+        </p:nvSpPr>
+        <p:spPr>
+          <a:xfrm>
+            <a:off x="4160520" y="1956816"/>
+            <a:ext cx="841248" cy="841248"/>
+          </a:xfrm>
+          <a:prstGeom prst="rect">
+            <a:avLst/>
+          </a:prstGeom>
+          <a:solidFill>
+            <a:srgbClr val="FFFFFF"/>
+          </a:solidFill>
+          <a:ln w="12700">
+            <a:solidFill>
+              <a:srgbClr val="1F2933"/>
+            </a:solidFill>
+            <a:prstDash val="solid"/>
+          </a:ln>
+        </p:spPr>
+      </p:sp>
+      <p:sp>
+        <p:nvSpPr>
+          <p:cNvPr id="55" name="Shape 53"/>
+          <p:cNvSpPr/>
+          <p:nvPr/>
+        </p:nvSpPr>
+        <p:spPr>
+          <a:xfrm>
+            <a:off x="4265676" y="1956816"/>
+            <a:ext cx="0" cy="841248"/>
+          </a:xfrm>
+          <a:prstGeom prst="line">
+            <a:avLst/>
+          </a:prstGeom>
+          <a:noFill/>
+          <a:ln w="5080">
+            <a:solidFill>
+              <a:srgbClr val="E5EAF0"/>
+            </a:solidFill>
+            <a:prstDash val="solid"/>
+          </a:ln>
+        </p:spPr>
+      </p:sp>
+      <p:sp>
+        <p:nvSpPr>
+          <p:cNvPr id="56" name="Shape 54"/>
+          <p:cNvSpPr/>
+          <p:nvPr/>
+        </p:nvSpPr>
+        <p:spPr>
+          <a:xfrm>
+            <a:off x="4160520" y="2061972"/>
+            <a:ext cx="841248" cy="0"/>
+          </a:xfrm>
+          <a:prstGeom prst="line">
+            <a:avLst/>
+          </a:prstGeom>
+          <a:noFill/>
+          <a:ln w="5080">
+            <a:solidFill>
+              <a:srgbClr val="E5EAF0"/>
+            </a:solidFill>
+            <a:prstDash val="solid"/>
+          </a:ln>
+        </p:spPr>
+      </p:sp>
+      <p:sp>
+        <p:nvSpPr>
+          <p:cNvPr id="57" name="Shape 55"/>
+          <p:cNvSpPr/>
+          <p:nvPr/>
+        </p:nvSpPr>
+        <p:spPr>
+          <a:xfrm>
+            <a:off x="4370832" y="1956816"/>
+            <a:ext cx="0" cy="841248"/>
+          </a:xfrm>
+          <a:prstGeom prst="line">
+            <a:avLst/>
+          </a:prstGeom>
+          <a:noFill/>
+          <a:ln w="5080">
+            <a:solidFill>
+              <a:srgbClr val="E5EAF0"/>
+            </a:solidFill>
+            <a:prstDash val="solid"/>
+          </a:ln>
+        </p:spPr>
+      </p:sp>
+      <p:sp>
+        <p:nvSpPr>
+          <p:cNvPr id="58" name="Shape 56"/>
+          <p:cNvSpPr/>
+          <p:nvPr/>
+        </p:nvSpPr>
+        <p:spPr>
+          <a:xfrm>
+            <a:off x="4160520" y="2167128"/>
+            <a:ext cx="841248" cy="0"/>
+          </a:xfrm>
+          <a:prstGeom prst="line">
+            <a:avLst/>
+          </a:prstGeom>
+          <a:noFill/>
+          <a:ln w="5080">
+            <a:solidFill>
+              <a:srgbClr val="E5EAF0"/>
+            </a:solidFill>
+            <a:prstDash val="solid"/>
+          </a:ln>
+        </p:spPr>
+      </p:sp>
+      <p:sp>
+        <p:nvSpPr>
+          <p:cNvPr id="59" name="Shape 57"/>
+          <p:cNvSpPr/>
+          <p:nvPr/>
+        </p:nvSpPr>
+        <p:spPr>
+          <a:xfrm>
+            <a:off x="4475988" y="1956816"/>
+            <a:ext cx="0" cy="841248"/>
+          </a:xfrm>
+          <a:prstGeom prst="line">
+            <a:avLst/>
+          </a:prstGeom>
+          <a:noFill/>
+          <a:ln w="5080">
+            <a:solidFill>
+              <a:srgbClr val="E5EAF0"/>
+            </a:solidFill>
+            <a:prstDash val="solid"/>
+          </a:ln>
+        </p:spPr>
+      </p:sp>
+      <p:sp>
+        <p:nvSpPr>
+          <p:cNvPr id="60" name="Shape 58"/>
+          <p:cNvSpPr/>
+          <p:nvPr/>
+        </p:nvSpPr>
+        <p:spPr>
+          <a:xfrm>
+            <a:off x="4160520" y="2272284"/>
+            <a:ext cx="841248" cy="0"/>
+          </a:xfrm>
+          <a:prstGeom prst="line">
+            <a:avLst/>
+          </a:prstGeom>
+          <a:noFill/>
+          <a:ln w="5080">
+            <a:solidFill>
+              <a:srgbClr val="E5EAF0"/>
+            </a:solidFill>
+            <a:prstDash val="solid"/>
+          </a:ln>
+        </p:spPr>
+      </p:sp>
+      <p:sp>
+        <p:nvSpPr>
+          <p:cNvPr id="61" name="Shape 59"/>
+          <p:cNvSpPr/>
+          <p:nvPr/>
+        </p:nvSpPr>
+        <p:spPr>
+          <a:xfrm>
+            <a:off x="4581144" y="1956816"/>
+            <a:ext cx="0" cy="841248"/>
+          </a:xfrm>
+          <a:prstGeom prst="line">
+            <a:avLst/>
+          </a:prstGeom>
+          <a:noFill/>
+          <a:ln w="5080">
+            <a:solidFill>
+              <a:srgbClr val="E5EAF0"/>
+            </a:solidFill>
+            <a:prstDash val="solid"/>
+          </a:ln>
+        </p:spPr>
+      </p:sp>
+      <p:sp>
+        <p:nvSpPr>
+          <p:cNvPr id="62" name="Shape 60"/>
+          <p:cNvSpPr/>
+          <p:nvPr/>
+        </p:nvSpPr>
+        <p:spPr>
+          <a:xfrm>
+            <a:off x="4160520" y="2377440"/>
+            <a:ext cx="841248" cy="0"/>
+          </a:xfrm>
+          <a:prstGeom prst="line">
+            <a:avLst/>
+          </a:prstGeom>
+          <a:noFill/>
+          <a:ln w="5080">
+            <a:solidFill>
+              <a:srgbClr val="E5EAF0"/>
+            </a:solidFill>
+            <a:prstDash val="solid"/>
+          </a:ln>
+        </p:spPr>
+      </p:sp>
+      <p:sp>
+        <p:nvSpPr>
+          <p:cNvPr id="63" name="Shape 61"/>
+          <p:cNvSpPr/>
+          <p:nvPr/>
+        </p:nvSpPr>
+        <p:spPr>
+          <a:xfrm>
+            <a:off x="4686300" y="1956816"/>
+            <a:ext cx="0" cy="841248"/>
+          </a:xfrm>
+          <a:prstGeom prst="line">
+            <a:avLst/>
+          </a:prstGeom>
+          <a:noFill/>
+          <a:ln w="5080">
+            <a:solidFill>
+              <a:srgbClr val="E5EAF0"/>
+            </a:solidFill>
+            <a:prstDash val="solid"/>
+          </a:ln>
+        </p:spPr>
+      </p:sp>
+      <p:sp>
+        <p:nvSpPr>
+          <p:cNvPr id="64" name="Shape 62"/>
+          <p:cNvSpPr/>
+          <p:nvPr/>
+        </p:nvSpPr>
+        <p:spPr>
+          <a:xfrm>
+            <a:off x="4160520" y="2482596"/>
+            <a:ext cx="841248" cy="0"/>
+          </a:xfrm>
+          <a:prstGeom prst="line">
+            <a:avLst/>
+          </a:prstGeom>
+          <a:noFill/>
+          <a:ln w="5080">
+            <a:solidFill>
+              <a:srgbClr val="E5EAF0"/>
+            </a:solidFill>
+            <a:prstDash val="solid"/>
+          </a:ln>
+        </p:spPr>
+      </p:sp>
+      <p:sp>
+        <p:nvSpPr>
+          <p:cNvPr id="65" name="Shape 63"/>
+          <p:cNvSpPr/>
+          <p:nvPr/>
+        </p:nvSpPr>
+        <p:spPr>
+          <a:xfrm>
+            <a:off x="4791456" y="1956816"/>
+            <a:ext cx="0" cy="841248"/>
+          </a:xfrm>
+          <a:prstGeom prst="line">
+            <a:avLst/>
+          </a:prstGeom>
+          <a:noFill/>
+          <a:ln w="5080">
+            <a:solidFill>
+              <a:srgbClr val="E5EAF0"/>
+            </a:solidFill>
+            <a:prstDash val="solid"/>
+          </a:ln>
+        </p:spPr>
+      </p:sp>
+      <p:sp>
+        <p:nvSpPr>
+          <p:cNvPr id="66" name="Shape 64"/>
+          <p:cNvSpPr/>
+          <p:nvPr/>
+        </p:nvSpPr>
+        <p:spPr>
+          <a:xfrm>
+            <a:off x="4160520" y="2587752"/>
+            <a:ext cx="841248" cy="0"/>
+          </a:xfrm>
+          <a:prstGeom prst="line">
+            <a:avLst/>
+          </a:prstGeom>
+          <a:noFill/>
+          <a:ln w="5080">
+            <a:solidFill>
+              <a:srgbClr val="E5EAF0"/>
+            </a:solidFill>
+            <a:prstDash val="solid"/>
+          </a:ln>
+        </p:spPr>
+      </p:sp>
+      <p:sp>
+        <p:nvSpPr>
+          <p:cNvPr id="67" name="Shape 65"/>
+          <p:cNvSpPr/>
+          <p:nvPr/>
+        </p:nvSpPr>
+        <p:spPr>
+          <a:xfrm>
+            <a:off x="4896612" y="1956816"/>
+            <a:ext cx="0" cy="841248"/>
+          </a:xfrm>
+          <a:prstGeom prst="line">
+            <a:avLst/>
+          </a:prstGeom>
+          <a:noFill/>
+          <a:ln w="5080">
+            <a:solidFill>
+              <a:srgbClr val="E5EAF0"/>
+            </a:solidFill>
+            <a:prstDash val="solid"/>
+          </a:ln>
+        </p:spPr>
+      </p:sp>
+      <p:sp>
+        <p:nvSpPr>
+          <p:cNvPr id="68" name="Shape 66"/>
+          <p:cNvSpPr/>
+          <p:nvPr/>
+        </p:nvSpPr>
+        <p:spPr>
+          <a:xfrm>
+            <a:off x="4160520" y="2692908"/>
+            <a:ext cx="841248" cy="0"/>
+          </a:xfrm>
+          <a:prstGeom prst="line">
+            <a:avLst/>
+          </a:prstGeom>
+          <a:noFill/>
+          <a:ln w="5080">
+            <a:solidFill>
+              <a:srgbClr val="E5EAF0"/>
+            </a:solidFill>
+            <a:prstDash val="solid"/>
+          </a:ln>
+        </p:spPr>
+      </p:sp>
+      <p:sp>
+        <p:nvSpPr>
+          <p:cNvPr id="69" name="Shape 67"/>
+          <p:cNvSpPr/>
+          <p:nvPr/>
+        </p:nvSpPr>
+        <p:spPr>
+          <a:xfrm>
+            <a:off x="4251960" y="2335378"/>
+            <a:ext cx="371246" cy="0"/>
+          </a:xfrm>
+          <a:prstGeom prst="line">
+            <a:avLst/>
+          </a:prstGeom>
+          <a:noFill/>
+          <a:ln w="17780">
+            <a:solidFill>
+              <a:srgbClr val="0969DA"/>
+            </a:solidFill>
+            <a:prstDash val="solid"/>
+          </a:ln>
+        </p:spPr>
+      </p:sp>
+      <p:sp>
+        <p:nvSpPr>
+          <p:cNvPr id="70" name="Shape 68"/>
+          <p:cNvSpPr/>
+          <p:nvPr/>
+        </p:nvSpPr>
+        <p:spPr>
+          <a:xfrm>
+            <a:off x="4623206" y="2335378"/>
+            <a:ext cx="0" cy="389534"/>
+          </a:xfrm>
+          <a:prstGeom prst="line">
+            <a:avLst/>
+          </a:prstGeom>
+          <a:noFill/>
+          <a:ln w="17780">
+            <a:solidFill>
+              <a:srgbClr val="FF7A1A"/>
+            </a:solidFill>
+            <a:prstDash val="solid"/>
+          </a:ln>
+        </p:spPr>
+      </p:sp>
+      <p:sp>
+        <p:nvSpPr>
+          <p:cNvPr id="71" name="Shape 69"/>
+          <p:cNvSpPr/>
+          <p:nvPr/>
+        </p:nvSpPr>
+        <p:spPr>
+          <a:xfrm>
+            <a:off x="4197096" y="2280514"/>
+            <a:ext cx="109728" cy="109728"/>
+          </a:xfrm>
+          <a:prstGeom prst="ellipse">
+            <a:avLst/>
+          </a:prstGeom>
+          <a:solidFill>
+            <a:srgbClr val="0969DA"/>
+          </a:solidFill>
+          <a:ln w="12700">
+            <a:solidFill>
+              <a:srgbClr val="0969DA">
+                <a:alpha val="0"/>
+              </a:srgbClr>
+            </a:solidFill>
+            <a:prstDash val="solid"/>
+          </a:ln>
+        </p:spPr>
+      </p:sp>
+      <p:sp>
+        <p:nvSpPr>
+          <p:cNvPr id="72" name="Shape 70"/>
+          <p:cNvSpPr/>
+          <p:nvPr/>
+        </p:nvSpPr>
+        <p:spPr>
+          <a:xfrm>
+            <a:off x="4568342" y="2670048"/>
+            <a:ext cx="109728" cy="109728"/>
           </a:xfrm>
           <a:prstGeom prst="ellipse">
             <a:avLst/>
@@ -2736,14 +2836,897 @@
       </p:sp>
       <p:sp>
         <p:nvSpPr>
-          <p:cNvPr id="58" name="Text 53"/>
-          <p:cNvSpPr/>
-          <p:nvPr/>
-        </p:nvSpPr>
-        <p:spPr>
-          <a:xfrm>
-            <a:off x="9729216" y="5404104"/>
-            <a:ext cx="1591056" cy="265176"/>
+          <p:cNvPr id="73" name="Shape 71"/>
+          <p:cNvSpPr/>
+          <p:nvPr/>
+        </p:nvSpPr>
+        <p:spPr>
+          <a:xfrm>
+            <a:off x="4540910" y="2253082"/>
+            <a:ext cx="164592" cy="164592"/>
+          </a:xfrm>
+          <a:prstGeom prst="sun">
+            <a:avLst/>
+          </a:prstGeom>
+          <a:solidFill>
+            <a:srgbClr val="FACC15"/>
+          </a:solidFill>
+          <a:ln w="12700">
+            <a:solidFill>
+              <a:srgbClr val="FACC15">
+                <a:alpha val="0"/>
+              </a:srgbClr>
+            </a:solidFill>
+            <a:prstDash val="solid"/>
+          </a:ln>
+        </p:spPr>
+      </p:sp>
+      <p:sp>
+        <p:nvSpPr>
+          <p:cNvPr id="74" name="Shape 72"/>
+          <p:cNvSpPr/>
+          <p:nvPr/>
+        </p:nvSpPr>
+        <p:spPr>
+          <a:xfrm>
+            <a:off x="5321808" y="1947672"/>
+            <a:ext cx="434340" cy="310896"/>
+          </a:xfrm>
+          <a:prstGeom prst="rect">
+            <a:avLst/>
+          </a:prstGeom>
+          <a:solidFill>
+            <a:srgbClr val="0969DA"/>
+          </a:solidFill>
+          <a:ln w="12700">
+            <a:solidFill>
+              <a:srgbClr val="0969DA">
+                <a:alpha val="0"/>
+              </a:srgbClr>
+            </a:solidFill>
+            <a:prstDash val="solid"/>
+          </a:ln>
+        </p:spPr>
+      </p:sp>
+      <p:sp>
+        <p:nvSpPr>
+          <p:cNvPr id="75" name="Shape 73"/>
+          <p:cNvSpPr/>
+          <p:nvPr/>
+        </p:nvSpPr>
+        <p:spPr>
+          <a:xfrm>
+            <a:off x="5756148" y="1947672"/>
+            <a:ext cx="434340" cy="310896"/>
+          </a:xfrm>
+          <a:prstGeom prst="rect">
+            <a:avLst/>
+          </a:prstGeom>
+          <a:solidFill>
+            <a:srgbClr val="2DA44E"/>
+          </a:solidFill>
+          <a:ln w="12700">
+            <a:solidFill>
+              <a:srgbClr val="2DA44E">
+                <a:alpha val="0"/>
+              </a:srgbClr>
+            </a:solidFill>
+            <a:prstDash val="solid"/>
+          </a:ln>
+        </p:spPr>
+      </p:sp>
+      <p:sp>
+        <p:nvSpPr>
+          <p:cNvPr id="76" name="Shape 74"/>
+          <p:cNvSpPr/>
+          <p:nvPr/>
+        </p:nvSpPr>
+        <p:spPr>
+          <a:xfrm>
+            <a:off x="5321808" y="2258568"/>
+            <a:ext cx="434340" cy="310896"/>
+          </a:xfrm>
+          <a:prstGeom prst="rect">
+            <a:avLst/>
+          </a:prstGeom>
+          <a:solidFill>
+            <a:srgbClr val="6F42C1"/>
+          </a:solidFill>
+          <a:ln w="12700">
+            <a:solidFill>
+              <a:srgbClr val="6F42C1">
+                <a:alpha val="0"/>
+              </a:srgbClr>
+            </a:solidFill>
+            <a:prstDash val="solid"/>
+          </a:ln>
+        </p:spPr>
+      </p:sp>
+      <p:sp>
+        <p:nvSpPr>
+          <p:cNvPr id="77" name="Shape 75"/>
+          <p:cNvSpPr/>
+          <p:nvPr/>
+        </p:nvSpPr>
+        <p:spPr>
+          <a:xfrm>
+            <a:off x="5756148" y="2258568"/>
+            <a:ext cx="434340" cy="310896"/>
+          </a:xfrm>
+          <a:prstGeom prst="rect">
+            <a:avLst/>
+          </a:prstGeom>
+          <a:solidFill>
+            <a:srgbClr val="FF7A1A"/>
+          </a:solidFill>
+          <a:ln w="12700">
+            <a:solidFill>
+              <a:srgbClr val="FF7A1A">
+                <a:alpha val="0"/>
+              </a:srgbClr>
+            </a:solidFill>
+            <a:prstDash val="solid"/>
+          </a:ln>
+        </p:spPr>
+      </p:sp>
+      <p:sp>
+        <p:nvSpPr>
+          <p:cNvPr id="78" name="Shape 76"/>
+          <p:cNvSpPr/>
+          <p:nvPr/>
+        </p:nvSpPr>
+        <p:spPr>
+          <a:xfrm>
+            <a:off x="5756148" y="1947672"/>
+            <a:ext cx="0" cy="621792"/>
+          </a:xfrm>
+          <a:prstGeom prst="line">
+            <a:avLst/>
+          </a:prstGeom>
+          <a:noFill/>
+          <a:ln w="17780">
+            <a:solidFill>
+              <a:srgbClr val="FFFFFF"/>
+            </a:solidFill>
+            <a:prstDash val="solid"/>
+          </a:ln>
+        </p:spPr>
+      </p:sp>
+      <p:sp>
+        <p:nvSpPr>
+          <p:cNvPr id="79" name="Shape 77"/>
+          <p:cNvSpPr/>
+          <p:nvPr/>
+        </p:nvSpPr>
+        <p:spPr>
+          <a:xfrm>
+            <a:off x="5321808" y="2258568"/>
+            <a:ext cx="868680" cy="0"/>
+          </a:xfrm>
+          <a:prstGeom prst="line">
+            <a:avLst/>
+          </a:prstGeom>
+          <a:noFill/>
+          <a:ln w="17780">
+            <a:solidFill>
+              <a:srgbClr val="FFFFFF"/>
+            </a:solidFill>
+            <a:prstDash val="solid"/>
+          </a:ln>
+        </p:spPr>
+      </p:sp>
+      <p:sp>
+        <p:nvSpPr>
+          <p:cNvPr id="80" name="Shape 78"/>
+          <p:cNvSpPr/>
+          <p:nvPr/>
+        </p:nvSpPr>
+        <p:spPr>
+          <a:xfrm>
+            <a:off x="5646420" y="2148840"/>
+            <a:ext cx="219456" cy="219456"/>
+          </a:xfrm>
+          <a:prstGeom prst="sun">
+            <a:avLst/>
+          </a:prstGeom>
+          <a:solidFill>
+            <a:srgbClr val="FACC15"/>
+          </a:solidFill>
+          <a:ln w="12700">
+            <a:solidFill>
+              <a:srgbClr val="FACC15">
+                <a:alpha val="0"/>
+              </a:srgbClr>
+            </a:solidFill>
+            <a:prstDash val="solid"/>
+          </a:ln>
+        </p:spPr>
+      </p:sp>
+      <p:sp>
+        <p:nvSpPr>
+          <p:cNvPr id="81" name="Shape 79"/>
+          <p:cNvSpPr/>
+          <p:nvPr/>
+        </p:nvSpPr>
+        <p:spPr>
+          <a:xfrm>
+            <a:off x="4160520" y="3063240"/>
+            <a:ext cx="1920240" cy="1078992"/>
+          </a:xfrm>
+          <a:prstGeom prst="rect">
+            <a:avLst/>
+          </a:prstGeom>
+          <a:solidFill>
+            <a:srgbClr val="FFFFFF"/>
+          </a:solidFill>
+          <a:ln w="10160">
+            <a:solidFill>
+              <a:srgbClr val="D8E1EA"/>
+            </a:solidFill>
+            <a:prstDash val="solid"/>
+          </a:ln>
+        </p:spPr>
+      </p:sp>
+      <p:sp>
+        <p:nvSpPr>
+          <p:cNvPr id="82" name="Shape 80"/>
+          <p:cNvSpPr/>
+          <p:nvPr/>
+        </p:nvSpPr>
+        <p:spPr>
+          <a:xfrm>
+            <a:off x="4160520" y="3279038"/>
+            <a:ext cx="1920240" cy="0"/>
+          </a:xfrm>
+          <a:prstGeom prst="line">
+            <a:avLst/>
+          </a:prstGeom>
+          <a:noFill/>
+          <a:ln w="5080">
+            <a:solidFill>
+              <a:srgbClr val="E5EAF0"/>
+            </a:solidFill>
+            <a:prstDash val="solid"/>
+          </a:ln>
+        </p:spPr>
+      </p:sp>
+      <p:sp>
+        <p:nvSpPr>
+          <p:cNvPr id="83" name="Shape 81"/>
+          <p:cNvSpPr/>
+          <p:nvPr/>
+        </p:nvSpPr>
+        <p:spPr>
+          <a:xfrm>
+            <a:off x="4160520" y="3494837"/>
+            <a:ext cx="1920240" cy="0"/>
+          </a:xfrm>
+          <a:prstGeom prst="line">
+            <a:avLst/>
+          </a:prstGeom>
+          <a:noFill/>
+          <a:ln w="5080">
+            <a:solidFill>
+              <a:srgbClr val="E5EAF0"/>
+            </a:solidFill>
+            <a:prstDash val="solid"/>
+          </a:ln>
+        </p:spPr>
+      </p:sp>
+      <p:sp>
+        <p:nvSpPr>
+          <p:cNvPr id="84" name="Shape 82"/>
+          <p:cNvSpPr/>
+          <p:nvPr/>
+        </p:nvSpPr>
+        <p:spPr>
+          <a:xfrm>
+            <a:off x="4160520" y="3710635"/>
+            <a:ext cx="1920240" cy="0"/>
+          </a:xfrm>
+          <a:prstGeom prst="line">
+            <a:avLst/>
+          </a:prstGeom>
+          <a:noFill/>
+          <a:ln w="5080">
+            <a:solidFill>
+              <a:srgbClr val="E5EAF0"/>
+            </a:solidFill>
+            <a:prstDash val="solid"/>
+          </a:ln>
+        </p:spPr>
+      </p:sp>
+      <p:sp>
+        <p:nvSpPr>
+          <p:cNvPr id="85" name="Shape 83"/>
+          <p:cNvSpPr/>
+          <p:nvPr/>
+        </p:nvSpPr>
+        <p:spPr>
+          <a:xfrm>
+            <a:off x="4160520" y="3926434"/>
+            <a:ext cx="1920240" cy="0"/>
+          </a:xfrm>
+          <a:prstGeom prst="line">
+            <a:avLst/>
+          </a:prstGeom>
+          <a:noFill/>
+          <a:ln w="5080">
+            <a:solidFill>
+              <a:srgbClr val="E5EAF0"/>
+            </a:solidFill>
+            <a:prstDash val="solid"/>
+          </a:ln>
+        </p:spPr>
+      </p:sp>
+      <p:sp>
+        <p:nvSpPr>
+          <p:cNvPr id="86" name="Shape 84"/>
+          <p:cNvSpPr/>
+          <p:nvPr/>
+        </p:nvSpPr>
+        <p:spPr>
+          <a:xfrm>
+            <a:off x="4389120" y="3300618"/>
+            <a:ext cx="487680" cy="32370"/>
+          </a:xfrm>
+          <a:prstGeom prst="line">
+            <a:avLst/>
+          </a:prstGeom>
+          <a:noFill/>
+          <a:ln w="17780">
+            <a:solidFill>
+              <a:srgbClr val="0969DA"/>
+            </a:solidFill>
+            <a:prstDash val="solid"/>
+          </a:ln>
+        </p:spPr>
+      </p:sp>
+      <p:sp>
+        <p:nvSpPr>
+          <p:cNvPr id="87" name="Shape 85"/>
+          <p:cNvSpPr/>
+          <p:nvPr/>
+        </p:nvSpPr>
+        <p:spPr>
+          <a:xfrm>
+            <a:off x="4876800" y="3332988"/>
+            <a:ext cx="487680" cy="21580"/>
+          </a:xfrm>
+          <a:prstGeom prst="line">
+            <a:avLst/>
+          </a:prstGeom>
+          <a:noFill/>
+          <a:ln w="17780">
+            <a:solidFill>
+              <a:srgbClr val="0969DA"/>
+            </a:solidFill>
+            <a:prstDash val="solid"/>
+          </a:ln>
+        </p:spPr>
+      </p:sp>
+      <p:sp>
+        <p:nvSpPr>
+          <p:cNvPr id="88" name="Shape 86"/>
+          <p:cNvSpPr/>
+          <p:nvPr/>
+        </p:nvSpPr>
+        <p:spPr>
+          <a:xfrm>
+            <a:off x="5364480" y="3354568"/>
+            <a:ext cx="487680" cy="10790"/>
+          </a:xfrm>
+          <a:prstGeom prst="line">
+            <a:avLst/>
+          </a:prstGeom>
+          <a:noFill/>
+          <a:ln w="17780">
+            <a:solidFill>
+              <a:srgbClr val="0969DA"/>
+            </a:solidFill>
+            <a:prstDash val="solid"/>
+          </a:ln>
+        </p:spPr>
+      </p:sp>
+      <p:sp>
+        <p:nvSpPr>
+          <p:cNvPr id="89" name="Shape 87"/>
+          <p:cNvSpPr/>
+          <p:nvPr/>
+        </p:nvSpPr>
+        <p:spPr>
+          <a:xfrm>
+            <a:off x="4357116" y="3268614"/>
+            <a:ext cx="64008" cy="64008"/>
+          </a:xfrm>
+          <a:prstGeom prst="ellipse">
+            <a:avLst/>
+          </a:prstGeom>
+          <a:solidFill>
+            <a:srgbClr val="0969DA"/>
+          </a:solidFill>
+          <a:ln w="12700">
+            <a:solidFill>
+              <a:srgbClr val="0969DA">
+                <a:alpha val="0"/>
+              </a:srgbClr>
+            </a:solidFill>
+            <a:prstDash val="solid"/>
+          </a:ln>
+        </p:spPr>
+      </p:sp>
+      <p:sp>
+        <p:nvSpPr>
+          <p:cNvPr id="90" name="Shape 88"/>
+          <p:cNvSpPr/>
+          <p:nvPr/>
+        </p:nvSpPr>
+        <p:spPr>
+          <a:xfrm>
+            <a:off x="4844796" y="3300984"/>
+            <a:ext cx="64008" cy="64008"/>
+          </a:xfrm>
+          <a:prstGeom prst="ellipse">
+            <a:avLst/>
+          </a:prstGeom>
+          <a:solidFill>
+            <a:srgbClr val="0969DA"/>
+          </a:solidFill>
+          <a:ln w="12700">
+            <a:solidFill>
+              <a:srgbClr val="0969DA">
+                <a:alpha val="0"/>
+              </a:srgbClr>
+            </a:solidFill>
+            <a:prstDash val="solid"/>
+          </a:ln>
+        </p:spPr>
+      </p:sp>
+      <p:sp>
+        <p:nvSpPr>
+          <p:cNvPr id="91" name="Shape 89"/>
+          <p:cNvSpPr/>
+          <p:nvPr/>
+        </p:nvSpPr>
+        <p:spPr>
+          <a:xfrm>
+            <a:off x="5332476" y="3322564"/>
+            <a:ext cx="64008" cy="64008"/>
+          </a:xfrm>
+          <a:prstGeom prst="ellipse">
+            <a:avLst/>
+          </a:prstGeom>
+          <a:solidFill>
+            <a:srgbClr val="0969DA"/>
+          </a:solidFill>
+          <a:ln w="12700">
+            <a:solidFill>
+              <a:srgbClr val="0969DA">
+                <a:alpha val="0"/>
+              </a:srgbClr>
+            </a:solidFill>
+            <a:prstDash val="solid"/>
+          </a:ln>
+        </p:spPr>
+      </p:sp>
+      <p:sp>
+        <p:nvSpPr>
+          <p:cNvPr id="92" name="Shape 90"/>
+          <p:cNvSpPr/>
+          <p:nvPr/>
+        </p:nvSpPr>
+        <p:spPr>
+          <a:xfrm>
+            <a:off x="5820156" y="3333354"/>
+            <a:ext cx="64008" cy="64008"/>
+          </a:xfrm>
+          <a:prstGeom prst="ellipse">
+            <a:avLst/>
+          </a:prstGeom>
+          <a:solidFill>
+            <a:srgbClr val="0969DA"/>
+          </a:solidFill>
+          <a:ln w="12700">
+            <a:solidFill>
+              <a:srgbClr val="0969DA">
+                <a:alpha val="0"/>
+              </a:srgbClr>
+            </a:solidFill>
+            <a:prstDash val="solid"/>
+          </a:ln>
+        </p:spPr>
+      </p:sp>
+      <p:sp>
+        <p:nvSpPr>
+          <p:cNvPr id="93" name="Shape 91"/>
+          <p:cNvSpPr/>
+          <p:nvPr/>
+        </p:nvSpPr>
+        <p:spPr>
+          <a:xfrm>
+            <a:off x="4389120" y="3257459"/>
+            <a:ext cx="487680" cy="86319"/>
+          </a:xfrm>
+          <a:prstGeom prst="line">
+            <a:avLst/>
+          </a:prstGeom>
+          <a:noFill/>
+          <a:ln w="17780">
+            <a:solidFill>
+              <a:srgbClr val="FF7A1A"/>
+            </a:solidFill>
+            <a:prstDash val="solid"/>
+          </a:ln>
+        </p:spPr>
+      </p:sp>
+      <p:sp>
+        <p:nvSpPr>
+          <p:cNvPr id="94" name="Shape 92"/>
+          <p:cNvSpPr/>
+          <p:nvPr/>
+        </p:nvSpPr>
+        <p:spPr>
+          <a:xfrm>
+            <a:off x="4876800" y="3343778"/>
+            <a:ext cx="487680" cy="205008"/>
+          </a:xfrm>
+          <a:prstGeom prst="line">
+            <a:avLst/>
+          </a:prstGeom>
+          <a:noFill/>
+          <a:ln w="17780">
+            <a:solidFill>
+              <a:srgbClr val="FF7A1A"/>
+            </a:solidFill>
+            <a:prstDash val="solid"/>
+          </a:ln>
+        </p:spPr>
+      </p:sp>
+      <p:sp>
+        <p:nvSpPr>
+          <p:cNvPr id="95" name="Shape 93"/>
+          <p:cNvSpPr/>
+          <p:nvPr/>
+        </p:nvSpPr>
+        <p:spPr>
+          <a:xfrm>
+            <a:off x="5364480" y="3548786"/>
+            <a:ext cx="487680" cy="226588"/>
+          </a:xfrm>
+          <a:prstGeom prst="line">
+            <a:avLst/>
+          </a:prstGeom>
+          <a:noFill/>
+          <a:ln w="17780">
+            <a:solidFill>
+              <a:srgbClr val="FF7A1A"/>
+            </a:solidFill>
+            <a:prstDash val="solid"/>
+          </a:ln>
+        </p:spPr>
+      </p:sp>
+      <p:sp>
+        <p:nvSpPr>
+          <p:cNvPr id="96" name="Shape 94"/>
+          <p:cNvSpPr/>
+          <p:nvPr/>
+        </p:nvSpPr>
+        <p:spPr>
+          <a:xfrm>
+            <a:off x="4357116" y="3225455"/>
+            <a:ext cx="64008" cy="64008"/>
+          </a:xfrm>
+          <a:prstGeom prst="ellipse">
+            <a:avLst/>
+          </a:prstGeom>
+          <a:solidFill>
+            <a:srgbClr val="FF7A1A"/>
+          </a:solidFill>
+          <a:ln w="12700">
+            <a:solidFill>
+              <a:srgbClr val="FF7A1A">
+                <a:alpha val="0"/>
+              </a:srgbClr>
+            </a:solidFill>
+            <a:prstDash val="solid"/>
+          </a:ln>
+        </p:spPr>
+      </p:sp>
+      <p:sp>
+        <p:nvSpPr>
+          <p:cNvPr id="97" name="Shape 95"/>
+          <p:cNvSpPr/>
+          <p:nvPr/>
+        </p:nvSpPr>
+        <p:spPr>
+          <a:xfrm>
+            <a:off x="4844796" y="3311774"/>
+            <a:ext cx="64008" cy="64008"/>
+          </a:xfrm>
+          <a:prstGeom prst="ellipse">
+            <a:avLst/>
+          </a:prstGeom>
+          <a:solidFill>
+            <a:srgbClr val="FF7A1A"/>
+          </a:solidFill>
+          <a:ln w="12700">
+            <a:solidFill>
+              <a:srgbClr val="FF7A1A">
+                <a:alpha val="0"/>
+              </a:srgbClr>
+            </a:solidFill>
+            <a:prstDash val="solid"/>
+          </a:ln>
+        </p:spPr>
+      </p:sp>
+      <p:sp>
+        <p:nvSpPr>
+          <p:cNvPr id="98" name="Shape 96"/>
+          <p:cNvSpPr/>
+          <p:nvPr/>
+        </p:nvSpPr>
+        <p:spPr>
+          <a:xfrm>
+            <a:off x="5332476" y="3516782"/>
+            <a:ext cx="64008" cy="64008"/>
+          </a:xfrm>
+          <a:prstGeom prst="ellipse">
+            <a:avLst/>
+          </a:prstGeom>
+          <a:solidFill>
+            <a:srgbClr val="FF7A1A"/>
+          </a:solidFill>
+          <a:ln w="12700">
+            <a:solidFill>
+              <a:srgbClr val="FF7A1A">
+                <a:alpha val="0"/>
+              </a:srgbClr>
+            </a:solidFill>
+            <a:prstDash val="solid"/>
+          </a:ln>
+        </p:spPr>
+      </p:sp>
+      <p:sp>
+        <p:nvSpPr>
+          <p:cNvPr id="99" name="Shape 97"/>
+          <p:cNvSpPr/>
+          <p:nvPr/>
+        </p:nvSpPr>
+        <p:spPr>
+          <a:xfrm>
+            <a:off x="5820156" y="3743371"/>
+            <a:ext cx="64008" cy="64008"/>
+          </a:xfrm>
+          <a:prstGeom prst="ellipse">
+            <a:avLst/>
+          </a:prstGeom>
+          <a:solidFill>
+            <a:srgbClr val="FF7A1A"/>
+          </a:solidFill>
+          <a:ln w="12700">
+            <a:solidFill>
+              <a:srgbClr val="FF7A1A">
+                <a:alpha val="0"/>
+              </a:srgbClr>
+            </a:solidFill>
+            <a:prstDash val="solid"/>
+          </a:ln>
+        </p:spPr>
+      </p:sp>
+      <p:sp>
+        <p:nvSpPr>
+          <p:cNvPr id="100" name="Shape 98"/>
+          <p:cNvSpPr/>
+          <p:nvPr/>
+        </p:nvSpPr>
+        <p:spPr>
+          <a:xfrm>
+            <a:off x="4389120" y="3322198"/>
+            <a:ext cx="487680" cy="194219"/>
+          </a:xfrm>
+          <a:prstGeom prst="line">
+            <a:avLst/>
+          </a:prstGeom>
+          <a:noFill/>
+          <a:ln w="17780">
+            <a:solidFill>
+              <a:srgbClr val="2DA44E"/>
+            </a:solidFill>
+            <a:prstDash val="solid"/>
+          </a:ln>
+        </p:spPr>
+      </p:sp>
+      <p:sp>
+        <p:nvSpPr>
+          <p:cNvPr id="101" name="Shape 99"/>
+          <p:cNvSpPr/>
+          <p:nvPr/>
+        </p:nvSpPr>
+        <p:spPr>
+          <a:xfrm>
+            <a:off x="4876800" y="3516417"/>
+            <a:ext cx="487680" cy="129479"/>
+          </a:xfrm>
+          <a:prstGeom prst="line">
+            <a:avLst/>
+          </a:prstGeom>
+          <a:noFill/>
+          <a:ln w="17780">
+            <a:solidFill>
+              <a:srgbClr val="2DA44E"/>
+            </a:solidFill>
+            <a:prstDash val="solid"/>
+          </a:ln>
+        </p:spPr>
+      </p:sp>
+      <p:sp>
+        <p:nvSpPr>
+          <p:cNvPr id="102" name="Shape 100"/>
+          <p:cNvSpPr/>
+          <p:nvPr/>
+        </p:nvSpPr>
+        <p:spPr>
+          <a:xfrm>
+            <a:off x="5364480" y="3645896"/>
+            <a:ext cx="487680" cy="64740"/>
+          </a:xfrm>
+          <a:prstGeom prst="line">
+            <a:avLst/>
+          </a:prstGeom>
+          <a:noFill/>
+          <a:ln w="17780">
+            <a:solidFill>
+              <a:srgbClr val="2DA44E"/>
+            </a:solidFill>
+            <a:prstDash val="solid"/>
+          </a:ln>
+        </p:spPr>
+      </p:sp>
+      <p:sp>
+        <p:nvSpPr>
+          <p:cNvPr id="103" name="Shape 101"/>
+          <p:cNvSpPr/>
+          <p:nvPr/>
+        </p:nvSpPr>
+        <p:spPr>
+          <a:xfrm>
+            <a:off x="4357116" y="3290194"/>
+            <a:ext cx="64008" cy="64008"/>
+          </a:xfrm>
+          <a:prstGeom prst="ellipse">
+            <a:avLst/>
+          </a:prstGeom>
+          <a:solidFill>
+            <a:srgbClr val="2DA44E"/>
+          </a:solidFill>
+          <a:ln w="12700">
+            <a:solidFill>
+              <a:srgbClr val="2DA44E">
+                <a:alpha val="0"/>
+              </a:srgbClr>
+            </a:solidFill>
+            <a:prstDash val="solid"/>
+          </a:ln>
+        </p:spPr>
+      </p:sp>
+      <p:sp>
+        <p:nvSpPr>
+          <p:cNvPr id="104" name="Shape 102"/>
+          <p:cNvSpPr/>
+          <p:nvPr/>
+        </p:nvSpPr>
+        <p:spPr>
+          <a:xfrm>
+            <a:off x="4844796" y="3484413"/>
+            <a:ext cx="64008" cy="64008"/>
+          </a:xfrm>
+          <a:prstGeom prst="ellipse">
+            <a:avLst/>
+          </a:prstGeom>
+          <a:solidFill>
+            <a:srgbClr val="2DA44E"/>
+          </a:solidFill>
+          <a:ln w="12700">
+            <a:solidFill>
+              <a:srgbClr val="2DA44E">
+                <a:alpha val="0"/>
+              </a:srgbClr>
+            </a:solidFill>
+            <a:prstDash val="solid"/>
+          </a:ln>
+        </p:spPr>
+      </p:sp>
+      <p:sp>
+        <p:nvSpPr>
+          <p:cNvPr id="105" name="Shape 103"/>
+          <p:cNvSpPr/>
+          <p:nvPr/>
+        </p:nvSpPr>
+        <p:spPr>
+          <a:xfrm>
+            <a:off x="5332476" y="3613892"/>
+            <a:ext cx="64008" cy="64008"/>
+          </a:xfrm>
+          <a:prstGeom prst="ellipse">
+            <a:avLst/>
+          </a:prstGeom>
+          <a:solidFill>
+            <a:srgbClr val="2DA44E"/>
+          </a:solidFill>
+          <a:ln w="12700">
+            <a:solidFill>
+              <a:srgbClr val="2DA44E">
+                <a:alpha val="0"/>
+              </a:srgbClr>
+            </a:solidFill>
+            <a:prstDash val="solid"/>
+          </a:ln>
+        </p:spPr>
+      </p:sp>
+      <p:sp>
+        <p:nvSpPr>
+          <p:cNvPr id="106" name="Shape 104"/>
+          <p:cNvSpPr/>
+          <p:nvPr/>
+        </p:nvSpPr>
+        <p:spPr>
+          <a:xfrm>
+            <a:off x="5820156" y="3678631"/>
+            <a:ext cx="64008" cy="64008"/>
+          </a:xfrm>
+          <a:prstGeom prst="ellipse">
+            <a:avLst/>
+          </a:prstGeom>
+          <a:solidFill>
+            <a:srgbClr val="2DA44E"/>
+          </a:solidFill>
+          <a:ln w="12700">
+            <a:solidFill>
+              <a:srgbClr val="2DA44E">
+                <a:alpha val="0"/>
+              </a:srgbClr>
+            </a:solidFill>
+            <a:prstDash val="solid"/>
+          </a:ln>
+        </p:spPr>
+      </p:sp>
+      <p:sp>
+        <p:nvSpPr>
+          <p:cNvPr id="107" name="Shape 105"/>
+          <p:cNvSpPr/>
+          <p:nvPr/>
+        </p:nvSpPr>
+        <p:spPr>
+          <a:xfrm>
+            <a:off x="4160520" y="4617720"/>
+            <a:ext cx="512064" cy="292608"/>
+          </a:xfrm>
+          <a:prstGeom prst="roundRect">
+            <a:avLst>
+              <a:gd name="adj" fmla="val 12500"/>
+            </a:avLst>
+          </a:prstGeom>
+          <a:solidFill>
+            <a:srgbClr val="FFFFFF"/>
+          </a:solidFill>
+          <a:ln w="15240">
+            <a:solidFill>
+              <a:srgbClr val="0969DA"/>
+            </a:solidFill>
+            <a:prstDash val="solid"/>
+          </a:ln>
+        </p:spPr>
+      </p:sp>
+      <p:sp>
+        <p:nvSpPr>
+          <p:cNvPr id="108" name="Text 106"/>
+          <p:cNvSpPr/>
+          <p:nvPr/>
+        </p:nvSpPr>
+        <p:spPr>
+          <a:xfrm>
+            <a:off x="4233672" y="4690872"/>
+            <a:ext cx="365760" cy="146304"/>
           </a:xfrm>
           <a:prstGeom prst="rect">
             <a:avLst/>
@@ -2755,7 +3738,244 @@
           <a:bodyPr wrap="square" lIns="0" tIns="0" rIns="0" bIns="0" rtlCol="0" anchor="ctr"/>
           <a:lstStyle/>
           <a:p>
-            <a:pPr algn="l" indent="0" marL="0">
+            <a:pPr algn="ctr" indent="0" marL="0">
+              <a:buNone/>
+            </a:pPr>
+            <a:r>
+              <a:rPr lang="en-US" sz="750" b="1" dirty="0">
+                <a:solidFill>
+                  <a:srgbClr val="0969DA"/>
+                </a:solidFill>
+                <a:latin typeface="Liberation Sans" pitchFamily="34" charset="0"/>
+                <a:ea typeface="Liberation Sans" pitchFamily="34" charset="-122"/>
+                <a:cs typeface="Liberation Sans" pitchFamily="34" charset="-120"/>
+              </a:rPr>
+              <a:t>Header</a:t>
+            </a:r>
+            <a:endParaRPr lang="en-US" sz="750" dirty="0"/>
+          </a:p>
+        </p:txBody>
+      </p:sp>
+      <p:sp>
+        <p:nvSpPr>
+          <p:cNvPr id="109" name="Shape 107"/>
+          <p:cNvSpPr/>
+          <p:nvPr/>
+        </p:nvSpPr>
+        <p:spPr>
+          <a:xfrm>
+            <a:off x="4782312" y="4617720"/>
+            <a:ext cx="512064" cy="292608"/>
+          </a:xfrm>
+          <a:prstGeom prst="roundRect">
+            <a:avLst>
+              <a:gd name="adj" fmla="val 12500"/>
+            </a:avLst>
+          </a:prstGeom>
+          <a:solidFill>
+            <a:srgbClr val="FFFFFF"/>
+          </a:solidFill>
+          <a:ln w="15240">
+            <a:solidFill>
+              <a:srgbClr val="FF7A1A"/>
+            </a:solidFill>
+            <a:prstDash val="solid"/>
+          </a:ln>
+        </p:spPr>
+      </p:sp>
+      <p:sp>
+        <p:nvSpPr>
+          <p:cNvPr id="110" name="Text 108"/>
+          <p:cNvSpPr/>
+          <p:nvPr/>
+        </p:nvSpPr>
+        <p:spPr>
+          <a:xfrm>
+            <a:off x="4855464" y="4690872"/>
+            <a:ext cx="365760" cy="146304"/>
+          </a:xfrm>
+          <a:prstGeom prst="rect">
+            <a:avLst/>
+          </a:prstGeom>
+          <a:noFill/>
+          <a:ln/>
+        </p:spPr>
+        <p:txBody>
+          <a:bodyPr wrap="square" lIns="0" tIns="0" rIns="0" bIns="0" rtlCol="0" anchor="ctr"/>
+          <a:lstStyle/>
+          <a:p>
+            <a:pPr algn="ctr" indent="0" marL="0">
+              <a:buNone/>
+            </a:pPr>
+            <a:r>
+              <a:rPr lang="en-US" sz="750" b="1" dirty="0">
+                <a:solidFill>
+                  <a:srgbClr val="FF7A1A"/>
+                </a:solidFill>
+                <a:latin typeface="Liberation Sans" pitchFamily="34" charset="0"/>
+                <a:ea typeface="Liberation Sans" pitchFamily="34" charset="-122"/>
+                <a:cs typeface="Liberation Sans" pitchFamily="34" charset="-120"/>
+              </a:rPr>
+              <a:t>Panel</a:t>
+            </a:r>
+            <a:endParaRPr lang="en-US" sz="750" dirty="0"/>
+          </a:p>
+        </p:txBody>
+      </p:sp>
+      <p:sp>
+        <p:nvSpPr>
+          <p:cNvPr id="111" name="Shape 109"/>
+          <p:cNvSpPr/>
+          <p:nvPr/>
+        </p:nvSpPr>
+        <p:spPr>
+          <a:xfrm>
+            <a:off x="5404104" y="4617720"/>
+            <a:ext cx="512064" cy="292608"/>
+          </a:xfrm>
+          <a:prstGeom prst="roundRect">
+            <a:avLst>
+              <a:gd name="adj" fmla="val 12500"/>
+            </a:avLst>
+          </a:prstGeom>
+          <a:solidFill>
+            <a:srgbClr val="FFFFFF"/>
+          </a:solidFill>
+          <a:ln w="15240">
+            <a:solidFill>
+              <a:srgbClr val="6F42C1"/>
+            </a:solidFill>
+            <a:prstDash val="solid"/>
+          </a:ln>
+        </p:spPr>
+      </p:sp>
+      <p:sp>
+        <p:nvSpPr>
+          <p:cNvPr id="112" name="Text 110"/>
+          <p:cNvSpPr/>
+          <p:nvPr/>
+        </p:nvSpPr>
+        <p:spPr>
+          <a:xfrm>
+            <a:off x="5477256" y="4690872"/>
+            <a:ext cx="365760" cy="146304"/>
+          </a:xfrm>
+          <a:prstGeom prst="rect">
+            <a:avLst/>
+          </a:prstGeom>
+          <a:noFill/>
+          <a:ln/>
+        </p:spPr>
+        <p:txBody>
+          <a:bodyPr wrap="square" lIns="0" tIns="0" rIns="0" bIns="0" rtlCol="0" anchor="ctr"/>
+          <a:lstStyle/>
+          <a:p>
+            <a:pPr algn="ctr" indent="0" marL="0">
+              <a:buNone/>
+            </a:pPr>
+            <a:r>
+              <a:rPr lang="en-US" sz="750" b="1" dirty="0">
+                <a:solidFill>
+                  <a:srgbClr val="6F42C1"/>
+                </a:solidFill>
+                <a:latin typeface="Liberation Sans" pitchFamily="34" charset="0"/>
+                <a:ea typeface="Liberation Sans" pitchFamily="34" charset="-122"/>
+                <a:cs typeface="Liberation Sans" pitchFamily="34" charset="-120"/>
+              </a:rPr>
+              <a:t>Chart</a:t>
+            </a:r>
+            <a:endParaRPr lang="en-US" sz="750" dirty="0"/>
+          </a:p>
+        </p:txBody>
+      </p:sp>
+      <p:sp>
+        <p:nvSpPr>
+          <p:cNvPr id="113" name="Shape 111"/>
+          <p:cNvSpPr/>
+          <p:nvPr/>
+        </p:nvSpPr>
+        <p:spPr>
+          <a:xfrm>
+            <a:off x="6025896" y="4617720"/>
+            <a:ext cx="512064" cy="292608"/>
+          </a:xfrm>
+          <a:prstGeom prst="roundRect">
+            <a:avLst>
+              <a:gd name="adj" fmla="val 12500"/>
+            </a:avLst>
+          </a:prstGeom>
+          <a:solidFill>
+            <a:srgbClr val="FFFFFF"/>
+          </a:solidFill>
+          <a:ln w="15240">
+            <a:solidFill>
+              <a:srgbClr val="2DA44E"/>
+            </a:solidFill>
+            <a:prstDash val="solid"/>
+          </a:ln>
+        </p:spPr>
+      </p:sp>
+      <p:sp>
+        <p:nvSpPr>
+          <p:cNvPr id="114" name="Text 112"/>
+          <p:cNvSpPr/>
+          <p:nvPr/>
+        </p:nvSpPr>
+        <p:spPr>
+          <a:xfrm>
+            <a:off x="6099048" y="4690872"/>
+            <a:ext cx="365760" cy="146304"/>
+          </a:xfrm>
+          <a:prstGeom prst="rect">
+            <a:avLst/>
+          </a:prstGeom>
+          <a:noFill/>
+          <a:ln/>
+        </p:spPr>
+        <p:txBody>
+          <a:bodyPr wrap="square" lIns="0" tIns="0" rIns="0" bIns="0" rtlCol="0" anchor="ctr"/>
+          <a:lstStyle/>
+          <a:p>
+            <a:pPr algn="ctr" indent="0" marL="0">
+              <a:buNone/>
+            </a:pPr>
+            <a:r>
+              <a:rPr lang="en-US" sz="750" b="1" dirty="0">
+                <a:solidFill>
+                  <a:srgbClr val="2DA44E"/>
+                </a:solidFill>
+                <a:latin typeface="Liberation Sans" pitchFamily="34" charset="0"/>
+                <a:ea typeface="Liberation Sans" pitchFamily="34" charset="-122"/>
+                <a:cs typeface="Liberation Sans" pitchFamily="34" charset="-120"/>
+              </a:rPr>
+              <a:t>Footer</a:t>
+            </a:r>
+            <a:endParaRPr lang="en-US" sz="750" dirty="0"/>
+          </a:p>
+        </p:txBody>
+      </p:sp>
+      <p:sp>
+        <p:nvSpPr>
+          <p:cNvPr id="115" name="Text 113"/>
+          <p:cNvSpPr/>
+          <p:nvPr/>
+        </p:nvSpPr>
+        <p:spPr>
+          <a:xfrm>
+            <a:off x="4133088" y="5138928"/>
+            <a:ext cx="2148840" cy="292608"/>
+          </a:xfrm>
+          <a:prstGeom prst="rect">
+            <a:avLst/>
+          </a:prstGeom>
+          <a:noFill/>
+          <a:ln/>
+        </p:spPr>
+        <p:txBody>
+          <a:bodyPr wrap="square" lIns="0" tIns="0" rIns="0" bIns="0" rtlCol="0" anchor="ctr"/>
+          <a:lstStyle/>
+          <a:p>
+            <a:pPr algn="ctr" indent="0" marL="0">
               <a:buNone/>
             </a:pPr>
             <a:r>
@@ -2767,7 +3987,7 @@
                 <a:ea typeface="Liberation Sans" pitchFamily="34" charset="-122"/>
                 <a:cs typeface="Liberation Sans" pitchFamily="34" charset="-120"/>
               </a:rPr>
-              <a:t>controls expose architecture-specific transfer bias</a:t>
+              <a:t>Generate or extract complete blocks instead of splitting charts from labels.</a:t>
             </a:r>
             <a:endParaRPr lang="en-US" sz="820" dirty="0"/>
           </a:p>
@@ -2775,16 +3995,544 @@
       </p:sp>
       <p:sp>
         <p:nvSpPr>
-          <p:cNvPr id="59" name="Shape 54"/>
-          <p:cNvSpPr/>
-          <p:nvPr/>
-        </p:nvSpPr>
-        <p:spPr>
-          <a:xfrm>
-            <a:off x="7516368" y="5815584"/>
-            <a:ext cx="73152" cy="73152"/>
+          <p:cNvPr id="116" name="Shape 114"/>
+          <p:cNvSpPr/>
+          <p:nvPr/>
+        </p:nvSpPr>
+        <p:spPr>
+          <a:xfrm>
+            <a:off x="7452360" y="1965960"/>
+            <a:ext cx="1170432" cy="1170432"/>
+          </a:xfrm>
+          <a:prstGeom prst="rect">
+            <a:avLst/>
+          </a:prstGeom>
+          <a:solidFill>
+            <a:srgbClr val="FFFFFF"/>
+          </a:solidFill>
+          <a:ln w="12700">
+            <a:solidFill>
+              <a:srgbClr val="1F2933"/>
+            </a:solidFill>
+            <a:prstDash val="solid"/>
+          </a:ln>
+        </p:spPr>
+      </p:sp>
+      <p:sp>
+        <p:nvSpPr>
+          <p:cNvPr id="117" name="Shape 115"/>
+          <p:cNvSpPr/>
+          <p:nvPr/>
+        </p:nvSpPr>
+        <p:spPr>
+          <a:xfrm>
+            <a:off x="7598664" y="1965960"/>
+            <a:ext cx="0" cy="1170432"/>
+          </a:xfrm>
+          <a:prstGeom prst="line">
+            <a:avLst/>
+          </a:prstGeom>
+          <a:noFill/>
+          <a:ln w="5080">
+            <a:solidFill>
+              <a:srgbClr val="E5EAF0"/>
+            </a:solidFill>
+            <a:prstDash val="solid"/>
+          </a:ln>
+        </p:spPr>
+      </p:sp>
+      <p:sp>
+        <p:nvSpPr>
+          <p:cNvPr id="118" name="Shape 116"/>
+          <p:cNvSpPr/>
+          <p:nvPr/>
+        </p:nvSpPr>
+        <p:spPr>
+          <a:xfrm>
+            <a:off x="7452360" y="2112264"/>
+            <a:ext cx="1170432" cy="0"/>
+          </a:xfrm>
+          <a:prstGeom prst="line">
+            <a:avLst/>
+          </a:prstGeom>
+          <a:noFill/>
+          <a:ln w="5080">
+            <a:solidFill>
+              <a:srgbClr val="E5EAF0"/>
+            </a:solidFill>
+            <a:prstDash val="solid"/>
+          </a:ln>
+        </p:spPr>
+      </p:sp>
+      <p:sp>
+        <p:nvSpPr>
+          <p:cNvPr id="119" name="Shape 117"/>
+          <p:cNvSpPr/>
+          <p:nvPr/>
+        </p:nvSpPr>
+        <p:spPr>
+          <a:xfrm>
+            <a:off x="7744968" y="1965960"/>
+            <a:ext cx="0" cy="1170432"/>
+          </a:xfrm>
+          <a:prstGeom prst="line">
+            <a:avLst/>
+          </a:prstGeom>
+          <a:noFill/>
+          <a:ln w="5080">
+            <a:solidFill>
+              <a:srgbClr val="E5EAF0"/>
+            </a:solidFill>
+            <a:prstDash val="solid"/>
+          </a:ln>
+        </p:spPr>
+      </p:sp>
+      <p:sp>
+        <p:nvSpPr>
+          <p:cNvPr id="120" name="Shape 118"/>
+          <p:cNvSpPr/>
+          <p:nvPr/>
+        </p:nvSpPr>
+        <p:spPr>
+          <a:xfrm>
+            <a:off x="7452360" y="2258568"/>
+            <a:ext cx="1170432" cy="0"/>
+          </a:xfrm>
+          <a:prstGeom prst="line">
+            <a:avLst/>
+          </a:prstGeom>
+          <a:noFill/>
+          <a:ln w="5080">
+            <a:solidFill>
+              <a:srgbClr val="E5EAF0"/>
+            </a:solidFill>
+            <a:prstDash val="solid"/>
+          </a:ln>
+        </p:spPr>
+      </p:sp>
+      <p:sp>
+        <p:nvSpPr>
+          <p:cNvPr id="121" name="Shape 119"/>
+          <p:cNvSpPr/>
+          <p:nvPr/>
+        </p:nvSpPr>
+        <p:spPr>
+          <a:xfrm>
+            <a:off x="7891272" y="1965960"/>
+            <a:ext cx="0" cy="1170432"/>
+          </a:xfrm>
+          <a:prstGeom prst="line">
+            <a:avLst/>
+          </a:prstGeom>
+          <a:noFill/>
+          <a:ln w="5080">
+            <a:solidFill>
+              <a:srgbClr val="E5EAF0"/>
+            </a:solidFill>
+            <a:prstDash val="solid"/>
+          </a:ln>
+        </p:spPr>
+      </p:sp>
+      <p:sp>
+        <p:nvSpPr>
+          <p:cNvPr id="122" name="Shape 120"/>
+          <p:cNvSpPr/>
+          <p:nvPr/>
+        </p:nvSpPr>
+        <p:spPr>
+          <a:xfrm>
+            <a:off x="7452360" y="2404872"/>
+            <a:ext cx="1170432" cy="0"/>
+          </a:xfrm>
+          <a:prstGeom prst="line">
+            <a:avLst/>
+          </a:prstGeom>
+          <a:noFill/>
+          <a:ln w="5080">
+            <a:solidFill>
+              <a:srgbClr val="E5EAF0"/>
+            </a:solidFill>
+            <a:prstDash val="solid"/>
+          </a:ln>
+        </p:spPr>
+      </p:sp>
+      <p:sp>
+        <p:nvSpPr>
+          <p:cNvPr id="123" name="Shape 121"/>
+          <p:cNvSpPr/>
+          <p:nvPr/>
+        </p:nvSpPr>
+        <p:spPr>
+          <a:xfrm>
+            <a:off x="8037576" y="1965960"/>
+            <a:ext cx="0" cy="1170432"/>
+          </a:xfrm>
+          <a:prstGeom prst="line">
+            <a:avLst/>
+          </a:prstGeom>
+          <a:noFill/>
+          <a:ln w="5080">
+            <a:solidFill>
+              <a:srgbClr val="E5EAF0"/>
+            </a:solidFill>
+            <a:prstDash val="solid"/>
+          </a:ln>
+        </p:spPr>
+      </p:sp>
+      <p:sp>
+        <p:nvSpPr>
+          <p:cNvPr id="124" name="Shape 122"/>
+          <p:cNvSpPr/>
+          <p:nvPr/>
+        </p:nvSpPr>
+        <p:spPr>
+          <a:xfrm>
+            <a:off x="7452360" y="2551176"/>
+            <a:ext cx="1170432" cy="0"/>
+          </a:xfrm>
+          <a:prstGeom prst="line">
+            <a:avLst/>
+          </a:prstGeom>
+          <a:noFill/>
+          <a:ln w="5080">
+            <a:solidFill>
+              <a:srgbClr val="E5EAF0"/>
+            </a:solidFill>
+            <a:prstDash val="solid"/>
+          </a:ln>
+        </p:spPr>
+      </p:sp>
+      <p:sp>
+        <p:nvSpPr>
+          <p:cNvPr id="125" name="Shape 123"/>
+          <p:cNvSpPr/>
+          <p:nvPr/>
+        </p:nvSpPr>
+        <p:spPr>
+          <a:xfrm>
+            <a:off x="8183880" y="1965960"/>
+            <a:ext cx="0" cy="1170432"/>
+          </a:xfrm>
+          <a:prstGeom prst="line">
+            <a:avLst/>
+          </a:prstGeom>
+          <a:noFill/>
+          <a:ln w="5080">
+            <a:solidFill>
+              <a:srgbClr val="E5EAF0"/>
+            </a:solidFill>
+            <a:prstDash val="solid"/>
+          </a:ln>
+        </p:spPr>
+      </p:sp>
+      <p:sp>
+        <p:nvSpPr>
+          <p:cNvPr id="126" name="Shape 124"/>
+          <p:cNvSpPr/>
+          <p:nvPr/>
+        </p:nvSpPr>
+        <p:spPr>
+          <a:xfrm>
+            <a:off x="7452360" y="2697480"/>
+            <a:ext cx="1170432" cy="0"/>
+          </a:xfrm>
+          <a:prstGeom prst="line">
+            <a:avLst/>
+          </a:prstGeom>
+          <a:noFill/>
+          <a:ln w="5080">
+            <a:solidFill>
+              <a:srgbClr val="E5EAF0"/>
+            </a:solidFill>
+            <a:prstDash val="solid"/>
+          </a:ln>
+        </p:spPr>
+      </p:sp>
+      <p:sp>
+        <p:nvSpPr>
+          <p:cNvPr id="127" name="Shape 125"/>
+          <p:cNvSpPr/>
+          <p:nvPr/>
+        </p:nvSpPr>
+        <p:spPr>
+          <a:xfrm>
+            <a:off x="8330184" y="1965960"/>
+            <a:ext cx="0" cy="1170432"/>
+          </a:xfrm>
+          <a:prstGeom prst="line">
+            <a:avLst/>
+          </a:prstGeom>
+          <a:noFill/>
+          <a:ln w="5080">
+            <a:solidFill>
+              <a:srgbClr val="E5EAF0"/>
+            </a:solidFill>
+            <a:prstDash val="solid"/>
+          </a:ln>
+        </p:spPr>
+      </p:sp>
+      <p:sp>
+        <p:nvSpPr>
+          <p:cNvPr id="128" name="Shape 126"/>
+          <p:cNvSpPr/>
+          <p:nvPr/>
+        </p:nvSpPr>
+        <p:spPr>
+          <a:xfrm>
+            <a:off x="7452360" y="2843784"/>
+            <a:ext cx="1170432" cy="0"/>
+          </a:xfrm>
+          <a:prstGeom prst="line">
+            <a:avLst/>
+          </a:prstGeom>
+          <a:noFill/>
+          <a:ln w="5080">
+            <a:solidFill>
+              <a:srgbClr val="E5EAF0"/>
+            </a:solidFill>
+            <a:prstDash val="solid"/>
+          </a:ln>
+        </p:spPr>
+      </p:sp>
+      <p:sp>
+        <p:nvSpPr>
+          <p:cNvPr id="129" name="Shape 127"/>
+          <p:cNvSpPr/>
+          <p:nvPr/>
+        </p:nvSpPr>
+        <p:spPr>
+          <a:xfrm>
+            <a:off x="8476488" y="1965960"/>
+            <a:ext cx="0" cy="1170432"/>
+          </a:xfrm>
+          <a:prstGeom prst="line">
+            <a:avLst/>
+          </a:prstGeom>
+          <a:noFill/>
+          <a:ln w="5080">
+            <a:solidFill>
+              <a:srgbClr val="E5EAF0"/>
+            </a:solidFill>
+            <a:prstDash val="solid"/>
+          </a:ln>
+        </p:spPr>
+      </p:sp>
+      <p:sp>
+        <p:nvSpPr>
+          <p:cNvPr id="130" name="Shape 128"/>
+          <p:cNvSpPr/>
+          <p:nvPr/>
+        </p:nvSpPr>
+        <p:spPr>
+          <a:xfrm>
+            <a:off x="7452360" y="2990088"/>
+            <a:ext cx="1170432" cy="0"/>
+          </a:xfrm>
+          <a:prstGeom prst="line">
+            <a:avLst/>
+          </a:prstGeom>
+          <a:noFill/>
+          <a:ln w="5080">
+            <a:solidFill>
+              <a:srgbClr val="E5EAF0"/>
+            </a:solidFill>
+            <a:prstDash val="solid"/>
+          </a:ln>
+        </p:spPr>
+      </p:sp>
+      <p:sp>
+        <p:nvSpPr>
+          <p:cNvPr id="131" name="Shape 129"/>
+          <p:cNvSpPr/>
+          <p:nvPr/>
+        </p:nvSpPr>
+        <p:spPr>
+          <a:xfrm>
+            <a:off x="7543800" y="2492654"/>
+            <a:ext cx="552298" cy="0"/>
+          </a:xfrm>
+          <a:prstGeom prst="line">
+            <a:avLst/>
+          </a:prstGeom>
+          <a:noFill/>
+          <a:ln w="17780">
+            <a:solidFill>
+              <a:srgbClr val="0969DA"/>
+            </a:solidFill>
+            <a:prstDash val="solid"/>
+          </a:ln>
+        </p:spPr>
+      </p:sp>
+      <p:sp>
+        <p:nvSpPr>
+          <p:cNvPr id="132" name="Shape 130"/>
+          <p:cNvSpPr/>
+          <p:nvPr/>
+        </p:nvSpPr>
+        <p:spPr>
+          <a:xfrm>
+            <a:off x="8096098" y="2492654"/>
+            <a:ext cx="0" cy="570586"/>
+          </a:xfrm>
+          <a:prstGeom prst="line">
+            <a:avLst/>
+          </a:prstGeom>
+          <a:noFill/>
+          <a:ln w="17780">
+            <a:solidFill>
+              <a:srgbClr val="FF7A1A"/>
+            </a:solidFill>
+            <a:prstDash val="solid"/>
+          </a:ln>
+        </p:spPr>
+      </p:sp>
+      <p:sp>
+        <p:nvSpPr>
+          <p:cNvPr id="133" name="Shape 131"/>
+          <p:cNvSpPr/>
+          <p:nvPr/>
+        </p:nvSpPr>
+        <p:spPr>
+          <a:xfrm>
+            <a:off x="7488936" y="2437790"/>
+            <a:ext cx="109728" cy="109728"/>
           </a:xfrm>
           <a:prstGeom prst="ellipse">
+            <a:avLst/>
+          </a:prstGeom>
+          <a:solidFill>
+            <a:srgbClr val="0969DA"/>
+          </a:solidFill>
+          <a:ln w="12700">
+            <a:solidFill>
+              <a:srgbClr val="0969DA">
+                <a:alpha val="0"/>
+              </a:srgbClr>
+            </a:solidFill>
+            <a:prstDash val="solid"/>
+          </a:ln>
+        </p:spPr>
+      </p:sp>
+      <p:sp>
+        <p:nvSpPr>
+          <p:cNvPr id="134" name="Shape 132"/>
+          <p:cNvSpPr/>
+          <p:nvPr/>
+        </p:nvSpPr>
+        <p:spPr>
+          <a:xfrm>
+            <a:off x="8041234" y="3008376"/>
+            <a:ext cx="109728" cy="109728"/>
+          </a:xfrm>
+          <a:prstGeom prst="ellipse">
+            <a:avLst/>
+          </a:prstGeom>
+          <a:solidFill>
+            <a:srgbClr val="FF7A1A"/>
+          </a:solidFill>
+          <a:ln w="12700">
+            <a:solidFill>
+              <a:srgbClr val="FF7A1A">
+                <a:alpha val="0"/>
+              </a:srgbClr>
+            </a:solidFill>
+            <a:prstDash val="solid"/>
+          </a:ln>
+        </p:spPr>
+      </p:sp>
+      <p:sp>
+        <p:nvSpPr>
+          <p:cNvPr id="135" name="Shape 133"/>
+          <p:cNvSpPr/>
+          <p:nvPr/>
+        </p:nvSpPr>
+        <p:spPr>
+          <a:xfrm>
+            <a:off x="8013802" y="2410358"/>
+            <a:ext cx="164592" cy="164592"/>
+          </a:xfrm>
+          <a:prstGeom prst="sun">
+            <a:avLst/>
+          </a:prstGeom>
+          <a:solidFill>
+            <a:srgbClr val="FACC15"/>
+          </a:solidFill>
+          <a:ln w="12700">
+            <a:solidFill>
+              <a:srgbClr val="FACC15">
+                <a:alpha val="0"/>
+              </a:srgbClr>
+            </a:solidFill>
+            <a:prstDash val="solid"/>
+          </a:ln>
+        </p:spPr>
+      </p:sp>
+      <p:sp>
+        <p:nvSpPr>
+          <p:cNvPr id="136" name="Shape 134"/>
+          <p:cNvSpPr/>
+          <p:nvPr/>
+        </p:nvSpPr>
+        <p:spPr>
+          <a:xfrm>
+            <a:off x="7434072" y="3493008"/>
+            <a:ext cx="585216" cy="420624"/>
+          </a:xfrm>
+          <a:prstGeom prst="rect">
+            <a:avLst/>
+          </a:prstGeom>
+          <a:solidFill>
+            <a:srgbClr val="0969DA"/>
+          </a:solidFill>
+          <a:ln w="12700">
+            <a:solidFill>
+              <a:srgbClr val="0969DA">
+                <a:alpha val="0"/>
+              </a:srgbClr>
+            </a:solidFill>
+            <a:prstDash val="solid"/>
+          </a:ln>
+        </p:spPr>
+      </p:sp>
+      <p:sp>
+        <p:nvSpPr>
+          <p:cNvPr id="137" name="Shape 135"/>
+          <p:cNvSpPr/>
+          <p:nvPr/>
+        </p:nvSpPr>
+        <p:spPr>
+          <a:xfrm>
+            <a:off x="8019288" y="3493008"/>
+            <a:ext cx="585216" cy="420624"/>
+          </a:xfrm>
+          <a:prstGeom prst="rect">
+            <a:avLst/>
+          </a:prstGeom>
+          <a:solidFill>
+            <a:srgbClr val="2DA44E"/>
+          </a:solidFill>
+          <a:ln w="12700">
+            <a:solidFill>
+              <a:srgbClr val="2DA44E">
+                <a:alpha val="0"/>
+              </a:srgbClr>
+            </a:solidFill>
+            <a:prstDash val="solid"/>
+          </a:ln>
+        </p:spPr>
+      </p:sp>
+      <p:sp>
+        <p:nvSpPr>
+          <p:cNvPr id="138" name="Shape 136"/>
+          <p:cNvSpPr/>
+          <p:nvPr/>
+        </p:nvSpPr>
+        <p:spPr>
+          <a:xfrm>
+            <a:off x="7434072" y="3913632"/>
+            <a:ext cx="585216" cy="420624"/>
+          </a:xfrm>
+          <a:prstGeom prst="rect">
             <a:avLst/>
           </a:prstGeom>
           <a:solidFill>
@@ -2802,14 +4550,789 @@
       </p:sp>
       <p:sp>
         <p:nvSpPr>
-          <p:cNvPr id="60" name="Text 55"/>
-          <p:cNvSpPr/>
-          <p:nvPr/>
-        </p:nvSpPr>
-        <p:spPr>
-          <a:xfrm>
-            <a:off x="7662672" y="5742432"/>
-            <a:ext cx="1591056" cy="265176"/>
+          <p:cNvPr id="139" name="Shape 137"/>
+          <p:cNvSpPr/>
+          <p:nvPr/>
+        </p:nvSpPr>
+        <p:spPr>
+          <a:xfrm>
+            <a:off x="8019288" y="3913632"/>
+            <a:ext cx="585216" cy="420624"/>
+          </a:xfrm>
+          <a:prstGeom prst="rect">
+            <a:avLst/>
+          </a:prstGeom>
+          <a:solidFill>
+            <a:srgbClr val="FF7A1A"/>
+          </a:solidFill>
+          <a:ln w="12700">
+            <a:solidFill>
+              <a:srgbClr val="FF7A1A">
+                <a:alpha val="0"/>
+              </a:srgbClr>
+            </a:solidFill>
+            <a:prstDash val="solid"/>
+          </a:ln>
+        </p:spPr>
+      </p:sp>
+      <p:sp>
+        <p:nvSpPr>
+          <p:cNvPr id="140" name="Shape 138"/>
+          <p:cNvSpPr/>
+          <p:nvPr/>
+        </p:nvSpPr>
+        <p:spPr>
+          <a:xfrm>
+            <a:off x="8019288" y="3493008"/>
+            <a:ext cx="0" cy="841248"/>
+          </a:xfrm>
+          <a:prstGeom prst="line">
+            <a:avLst/>
+          </a:prstGeom>
+          <a:noFill/>
+          <a:ln w="17780">
+            <a:solidFill>
+              <a:srgbClr val="FFFFFF"/>
+            </a:solidFill>
+            <a:prstDash val="solid"/>
+          </a:ln>
+        </p:spPr>
+      </p:sp>
+      <p:sp>
+        <p:nvSpPr>
+          <p:cNvPr id="141" name="Shape 139"/>
+          <p:cNvSpPr/>
+          <p:nvPr/>
+        </p:nvSpPr>
+        <p:spPr>
+          <a:xfrm>
+            <a:off x="7434072" y="3913632"/>
+            <a:ext cx="1170432" cy="0"/>
+          </a:xfrm>
+          <a:prstGeom prst="line">
+            <a:avLst/>
+          </a:prstGeom>
+          <a:noFill/>
+          <a:ln w="17780">
+            <a:solidFill>
+              <a:srgbClr val="FFFFFF"/>
+            </a:solidFill>
+            <a:prstDash val="solid"/>
+          </a:ln>
+        </p:spPr>
+      </p:sp>
+      <p:sp>
+        <p:nvSpPr>
+          <p:cNvPr id="142" name="Shape 140"/>
+          <p:cNvSpPr/>
+          <p:nvPr/>
+        </p:nvSpPr>
+        <p:spPr>
+          <a:xfrm>
+            <a:off x="7909560" y="3803904"/>
+            <a:ext cx="219456" cy="219456"/>
+          </a:xfrm>
+          <a:prstGeom prst="sun">
+            <a:avLst/>
+          </a:prstGeom>
+          <a:solidFill>
+            <a:srgbClr val="FACC15"/>
+          </a:solidFill>
+          <a:ln w="12700">
+            <a:solidFill>
+              <a:srgbClr val="FACC15">
+                <a:alpha val="0"/>
+              </a:srgbClr>
+            </a:solidFill>
+            <a:prstDash val="solid"/>
+          </a:ln>
+        </p:spPr>
+      </p:sp>
+      <p:sp>
+        <p:nvSpPr>
+          <p:cNvPr id="143" name="Shape 141"/>
+          <p:cNvSpPr/>
+          <p:nvPr/>
+        </p:nvSpPr>
+        <p:spPr>
+          <a:xfrm>
+            <a:off x="9189720" y="1901952"/>
+            <a:ext cx="1965960" cy="1143000"/>
+          </a:xfrm>
+          <a:prstGeom prst="rect">
+            <a:avLst/>
+          </a:prstGeom>
+          <a:solidFill>
+            <a:srgbClr val="FFFFFF"/>
+          </a:solidFill>
+          <a:ln w="10160">
+            <a:solidFill>
+              <a:srgbClr val="D8E1EA"/>
+            </a:solidFill>
+            <a:prstDash val="solid"/>
+          </a:ln>
+        </p:spPr>
+      </p:sp>
+      <p:sp>
+        <p:nvSpPr>
+          <p:cNvPr id="144" name="Shape 142"/>
+          <p:cNvSpPr/>
+          <p:nvPr/>
+        </p:nvSpPr>
+        <p:spPr>
+          <a:xfrm>
+            <a:off x="9189720" y="2130552"/>
+            <a:ext cx="1965960" cy="0"/>
+          </a:xfrm>
+          <a:prstGeom prst="line">
+            <a:avLst/>
+          </a:prstGeom>
+          <a:noFill/>
+          <a:ln w="5080">
+            <a:solidFill>
+              <a:srgbClr val="E5EAF0"/>
+            </a:solidFill>
+            <a:prstDash val="solid"/>
+          </a:ln>
+        </p:spPr>
+      </p:sp>
+      <p:sp>
+        <p:nvSpPr>
+          <p:cNvPr id="145" name="Shape 143"/>
+          <p:cNvSpPr/>
+          <p:nvPr/>
+        </p:nvSpPr>
+        <p:spPr>
+          <a:xfrm>
+            <a:off x="9189720" y="2359152"/>
+            <a:ext cx="1965960" cy="0"/>
+          </a:xfrm>
+          <a:prstGeom prst="line">
+            <a:avLst/>
+          </a:prstGeom>
+          <a:noFill/>
+          <a:ln w="5080">
+            <a:solidFill>
+              <a:srgbClr val="E5EAF0"/>
+            </a:solidFill>
+            <a:prstDash val="solid"/>
+          </a:ln>
+        </p:spPr>
+      </p:sp>
+      <p:sp>
+        <p:nvSpPr>
+          <p:cNvPr id="146" name="Shape 144"/>
+          <p:cNvSpPr/>
+          <p:nvPr/>
+        </p:nvSpPr>
+        <p:spPr>
+          <a:xfrm>
+            <a:off x="9189720" y="2587752"/>
+            <a:ext cx="1965960" cy="0"/>
+          </a:xfrm>
+          <a:prstGeom prst="line">
+            <a:avLst/>
+          </a:prstGeom>
+          <a:noFill/>
+          <a:ln w="5080">
+            <a:solidFill>
+              <a:srgbClr val="E5EAF0"/>
+            </a:solidFill>
+            <a:prstDash val="solid"/>
+          </a:ln>
+        </p:spPr>
+      </p:sp>
+      <p:sp>
+        <p:nvSpPr>
+          <p:cNvPr id="147" name="Shape 145"/>
+          <p:cNvSpPr/>
+          <p:nvPr/>
+        </p:nvSpPr>
+        <p:spPr>
+          <a:xfrm>
+            <a:off x="9189720" y="2816352"/>
+            <a:ext cx="1965960" cy="0"/>
+          </a:xfrm>
+          <a:prstGeom prst="line">
+            <a:avLst/>
+          </a:prstGeom>
+          <a:noFill/>
+          <a:ln w="5080">
+            <a:solidFill>
+              <a:srgbClr val="E5EAF0"/>
+            </a:solidFill>
+            <a:prstDash val="solid"/>
+          </a:ln>
+        </p:spPr>
+      </p:sp>
+      <p:sp>
+        <p:nvSpPr>
+          <p:cNvPr id="148" name="Shape 146"/>
+          <p:cNvSpPr/>
+          <p:nvPr/>
+        </p:nvSpPr>
+        <p:spPr>
+          <a:xfrm>
+            <a:off x="9418320" y="2153412"/>
+            <a:ext cx="502920" cy="34290"/>
+          </a:xfrm>
+          <a:prstGeom prst="line">
+            <a:avLst/>
+          </a:prstGeom>
+          <a:noFill/>
+          <a:ln w="17780">
+            <a:solidFill>
+              <a:srgbClr val="0969DA"/>
+            </a:solidFill>
+            <a:prstDash val="solid"/>
+          </a:ln>
+        </p:spPr>
+      </p:sp>
+      <p:sp>
+        <p:nvSpPr>
+          <p:cNvPr id="149" name="Shape 147"/>
+          <p:cNvSpPr/>
+          <p:nvPr/>
+        </p:nvSpPr>
+        <p:spPr>
+          <a:xfrm>
+            <a:off x="9921240" y="2187702"/>
+            <a:ext cx="502920" cy="22860"/>
+          </a:xfrm>
+          <a:prstGeom prst="line">
+            <a:avLst/>
+          </a:prstGeom>
+          <a:noFill/>
+          <a:ln w="17780">
+            <a:solidFill>
+              <a:srgbClr val="0969DA"/>
+            </a:solidFill>
+            <a:prstDash val="solid"/>
+          </a:ln>
+        </p:spPr>
+      </p:sp>
+      <p:sp>
+        <p:nvSpPr>
+          <p:cNvPr id="150" name="Shape 148"/>
+          <p:cNvSpPr/>
+          <p:nvPr/>
+        </p:nvSpPr>
+        <p:spPr>
+          <a:xfrm>
+            <a:off x="10424160" y="2210562"/>
+            <a:ext cx="502920" cy="11430"/>
+          </a:xfrm>
+          <a:prstGeom prst="line">
+            <a:avLst/>
+          </a:prstGeom>
+          <a:noFill/>
+          <a:ln w="17780">
+            <a:solidFill>
+              <a:srgbClr val="0969DA"/>
+            </a:solidFill>
+            <a:prstDash val="solid"/>
+          </a:ln>
+        </p:spPr>
+      </p:sp>
+      <p:sp>
+        <p:nvSpPr>
+          <p:cNvPr id="151" name="Shape 149"/>
+          <p:cNvSpPr/>
+          <p:nvPr/>
+        </p:nvSpPr>
+        <p:spPr>
+          <a:xfrm>
+            <a:off x="9386316" y="2121408"/>
+            <a:ext cx="64008" cy="64008"/>
+          </a:xfrm>
+          <a:prstGeom prst="ellipse">
+            <a:avLst/>
+          </a:prstGeom>
+          <a:solidFill>
+            <a:srgbClr val="0969DA"/>
+          </a:solidFill>
+          <a:ln w="12700">
+            <a:solidFill>
+              <a:srgbClr val="0969DA">
+                <a:alpha val="0"/>
+              </a:srgbClr>
+            </a:solidFill>
+            <a:prstDash val="solid"/>
+          </a:ln>
+        </p:spPr>
+      </p:sp>
+      <p:sp>
+        <p:nvSpPr>
+          <p:cNvPr id="152" name="Shape 150"/>
+          <p:cNvSpPr/>
+          <p:nvPr/>
+        </p:nvSpPr>
+        <p:spPr>
+          <a:xfrm>
+            <a:off x="9889236" y="2155698"/>
+            <a:ext cx="64008" cy="64008"/>
+          </a:xfrm>
+          <a:prstGeom prst="ellipse">
+            <a:avLst/>
+          </a:prstGeom>
+          <a:solidFill>
+            <a:srgbClr val="0969DA"/>
+          </a:solidFill>
+          <a:ln w="12700">
+            <a:solidFill>
+              <a:srgbClr val="0969DA">
+                <a:alpha val="0"/>
+              </a:srgbClr>
+            </a:solidFill>
+            <a:prstDash val="solid"/>
+          </a:ln>
+        </p:spPr>
+      </p:sp>
+      <p:sp>
+        <p:nvSpPr>
+          <p:cNvPr id="153" name="Shape 151"/>
+          <p:cNvSpPr/>
+          <p:nvPr/>
+        </p:nvSpPr>
+        <p:spPr>
+          <a:xfrm>
+            <a:off x="10392156" y="2178558"/>
+            <a:ext cx="64008" cy="64008"/>
+          </a:xfrm>
+          <a:prstGeom prst="ellipse">
+            <a:avLst/>
+          </a:prstGeom>
+          <a:solidFill>
+            <a:srgbClr val="0969DA"/>
+          </a:solidFill>
+          <a:ln w="12700">
+            <a:solidFill>
+              <a:srgbClr val="0969DA">
+                <a:alpha val="0"/>
+              </a:srgbClr>
+            </a:solidFill>
+            <a:prstDash val="solid"/>
+          </a:ln>
+        </p:spPr>
+      </p:sp>
+      <p:sp>
+        <p:nvSpPr>
+          <p:cNvPr id="154" name="Shape 152"/>
+          <p:cNvSpPr/>
+          <p:nvPr/>
+        </p:nvSpPr>
+        <p:spPr>
+          <a:xfrm>
+            <a:off x="10895076" y="2189988"/>
+            <a:ext cx="64008" cy="64008"/>
+          </a:xfrm>
+          <a:prstGeom prst="ellipse">
+            <a:avLst/>
+          </a:prstGeom>
+          <a:solidFill>
+            <a:srgbClr val="0969DA"/>
+          </a:solidFill>
+          <a:ln w="12700">
+            <a:solidFill>
+              <a:srgbClr val="0969DA">
+                <a:alpha val="0"/>
+              </a:srgbClr>
+            </a:solidFill>
+            <a:prstDash val="solid"/>
+          </a:ln>
+        </p:spPr>
+      </p:sp>
+      <p:sp>
+        <p:nvSpPr>
+          <p:cNvPr id="155" name="Shape 153"/>
+          <p:cNvSpPr/>
+          <p:nvPr/>
+        </p:nvSpPr>
+        <p:spPr>
+          <a:xfrm>
+            <a:off x="9418320" y="2107692"/>
+            <a:ext cx="502920" cy="91440"/>
+          </a:xfrm>
+          <a:prstGeom prst="line">
+            <a:avLst/>
+          </a:prstGeom>
+          <a:noFill/>
+          <a:ln w="17780">
+            <a:solidFill>
+              <a:srgbClr val="FF7A1A"/>
+            </a:solidFill>
+            <a:prstDash val="solid"/>
+          </a:ln>
+        </p:spPr>
+      </p:sp>
+      <p:sp>
+        <p:nvSpPr>
+          <p:cNvPr id="156" name="Shape 154"/>
+          <p:cNvSpPr/>
+          <p:nvPr/>
+        </p:nvSpPr>
+        <p:spPr>
+          <a:xfrm>
+            <a:off x="9921240" y="2199132"/>
+            <a:ext cx="502920" cy="217170"/>
+          </a:xfrm>
+          <a:prstGeom prst="line">
+            <a:avLst/>
+          </a:prstGeom>
+          <a:noFill/>
+          <a:ln w="17780">
+            <a:solidFill>
+              <a:srgbClr val="FF7A1A"/>
+            </a:solidFill>
+            <a:prstDash val="solid"/>
+          </a:ln>
+        </p:spPr>
+      </p:sp>
+      <p:sp>
+        <p:nvSpPr>
+          <p:cNvPr id="157" name="Shape 155"/>
+          <p:cNvSpPr/>
+          <p:nvPr/>
+        </p:nvSpPr>
+        <p:spPr>
+          <a:xfrm>
+            <a:off x="10424160" y="2416302"/>
+            <a:ext cx="502920" cy="240030"/>
+          </a:xfrm>
+          <a:prstGeom prst="line">
+            <a:avLst/>
+          </a:prstGeom>
+          <a:noFill/>
+          <a:ln w="17780">
+            <a:solidFill>
+              <a:srgbClr val="FF7A1A"/>
+            </a:solidFill>
+            <a:prstDash val="solid"/>
+          </a:ln>
+        </p:spPr>
+      </p:sp>
+      <p:sp>
+        <p:nvSpPr>
+          <p:cNvPr id="158" name="Shape 156"/>
+          <p:cNvSpPr/>
+          <p:nvPr/>
+        </p:nvSpPr>
+        <p:spPr>
+          <a:xfrm>
+            <a:off x="9386316" y="2075688"/>
+            <a:ext cx="64008" cy="64008"/>
+          </a:xfrm>
+          <a:prstGeom prst="ellipse">
+            <a:avLst/>
+          </a:prstGeom>
+          <a:solidFill>
+            <a:srgbClr val="FF7A1A"/>
+          </a:solidFill>
+          <a:ln w="12700">
+            <a:solidFill>
+              <a:srgbClr val="FF7A1A">
+                <a:alpha val="0"/>
+              </a:srgbClr>
+            </a:solidFill>
+            <a:prstDash val="solid"/>
+          </a:ln>
+        </p:spPr>
+      </p:sp>
+      <p:sp>
+        <p:nvSpPr>
+          <p:cNvPr id="159" name="Shape 157"/>
+          <p:cNvSpPr/>
+          <p:nvPr/>
+        </p:nvSpPr>
+        <p:spPr>
+          <a:xfrm>
+            <a:off x="9889236" y="2167128"/>
+            <a:ext cx="64008" cy="64008"/>
+          </a:xfrm>
+          <a:prstGeom prst="ellipse">
+            <a:avLst/>
+          </a:prstGeom>
+          <a:solidFill>
+            <a:srgbClr val="FF7A1A"/>
+          </a:solidFill>
+          <a:ln w="12700">
+            <a:solidFill>
+              <a:srgbClr val="FF7A1A">
+                <a:alpha val="0"/>
+              </a:srgbClr>
+            </a:solidFill>
+            <a:prstDash val="solid"/>
+          </a:ln>
+        </p:spPr>
+      </p:sp>
+      <p:sp>
+        <p:nvSpPr>
+          <p:cNvPr id="160" name="Shape 158"/>
+          <p:cNvSpPr/>
+          <p:nvPr/>
+        </p:nvSpPr>
+        <p:spPr>
+          <a:xfrm>
+            <a:off x="10392156" y="2384298"/>
+            <a:ext cx="64008" cy="64008"/>
+          </a:xfrm>
+          <a:prstGeom prst="ellipse">
+            <a:avLst/>
+          </a:prstGeom>
+          <a:solidFill>
+            <a:srgbClr val="FF7A1A"/>
+          </a:solidFill>
+          <a:ln w="12700">
+            <a:solidFill>
+              <a:srgbClr val="FF7A1A">
+                <a:alpha val="0"/>
+              </a:srgbClr>
+            </a:solidFill>
+            <a:prstDash val="solid"/>
+          </a:ln>
+        </p:spPr>
+      </p:sp>
+      <p:sp>
+        <p:nvSpPr>
+          <p:cNvPr id="161" name="Shape 159"/>
+          <p:cNvSpPr/>
+          <p:nvPr/>
+        </p:nvSpPr>
+        <p:spPr>
+          <a:xfrm>
+            <a:off x="10895076" y="2624328"/>
+            <a:ext cx="64008" cy="64008"/>
+          </a:xfrm>
+          <a:prstGeom prst="ellipse">
+            <a:avLst/>
+          </a:prstGeom>
+          <a:solidFill>
+            <a:srgbClr val="FF7A1A"/>
+          </a:solidFill>
+          <a:ln w="12700">
+            <a:solidFill>
+              <a:srgbClr val="FF7A1A">
+                <a:alpha val="0"/>
+              </a:srgbClr>
+            </a:solidFill>
+            <a:prstDash val="solid"/>
+          </a:ln>
+        </p:spPr>
+      </p:sp>
+      <p:sp>
+        <p:nvSpPr>
+          <p:cNvPr id="162" name="Shape 160"/>
+          <p:cNvSpPr/>
+          <p:nvPr/>
+        </p:nvSpPr>
+        <p:spPr>
+          <a:xfrm>
+            <a:off x="9418320" y="2176272"/>
+            <a:ext cx="502920" cy="205740"/>
+          </a:xfrm>
+          <a:prstGeom prst="line">
+            <a:avLst/>
+          </a:prstGeom>
+          <a:noFill/>
+          <a:ln w="17780">
+            <a:solidFill>
+              <a:srgbClr val="2DA44E"/>
+            </a:solidFill>
+            <a:prstDash val="solid"/>
+          </a:ln>
+        </p:spPr>
+      </p:sp>
+      <p:sp>
+        <p:nvSpPr>
+          <p:cNvPr id="163" name="Shape 161"/>
+          <p:cNvSpPr/>
+          <p:nvPr/>
+        </p:nvSpPr>
+        <p:spPr>
+          <a:xfrm>
+            <a:off x="9921240" y="2382012"/>
+            <a:ext cx="502920" cy="137160"/>
+          </a:xfrm>
+          <a:prstGeom prst="line">
+            <a:avLst/>
+          </a:prstGeom>
+          <a:noFill/>
+          <a:ln w="17780">
+            <a:solidFill>
+              <a:srgbClr val="2DA44E"/>
+            </a:solidFill>
+            <a:prstDash val="solid"/>
+          </a:ln>
+        </p:spPr>
+      </p:sp>
+      <p:sp>
+        <p:nvSpPr>
+          <p:cNvPr id="164" name="Shape 162"/>
+          <p:cNvSpPr/>
+          <p:nvPr/>
+        </p:nvSpPr>
+        <p:spPr>
+          <a:xfrm>
+            <a:off x="10424160" y="2519172"/>
+            <a:ext cx="502920" cy="68580"/>
+          </a:xfrm>
+          <a:prstGeom prst="line">
+            <a:avLst/>
+          </a:prstGeom>
+          <a:noFill/>
+          <a:ln w="17780">
+            <a:solidFill>
+              <a:srgbClr val="2DA44E"/>
+            </a:solidFill>
+            <a:prstDash val="solid"/>
+          </a:ln>
+        </p:spPr>
+      </p:sp>
+      <p:sp>
+        <p:nvSpPr>
+          <p:cNvPr id="165" name="Shape 163"/>
+          <p:cNvSpPr/>
+          <p:nvPr/>
+        </p:nvSpPr>
+        <p:spPr>
+          <a:xfrm>
+            <a:off x="9386316" y="2144268"/>
+            <a:ext cx="64008" cy="64008"/>
+          </a:xfrm>
+          <a:prstGeom prst="ellipse">
+            <a:avLst/>
+          </a:prstGeom>
+          <a:solidFill>
+            <a:srgbClr val="2DA44E"/>
+          </a:solidFill>
+          <a:ln w="12700">
+            <a:solidFill>
+              <a:srgbClr val="2DA44E">
+                <a:alpha val="0"/>
+              </a:srgbClr>
+            </a:solidFill>
+            <a:prstDash val="solid"/>
+          </a:ln>
+        </p:spPr>
+      </p:sp>
+      <p:sp>
+        <p:nvSpPr>
+          <p:cNvPr id="166" name="Shape 164"/>
+          <p:cNvSpPr/>
+          <p:nvPr/>
+        </p:nvSpPr>
+        <p:spPr>
+          <a:xfrm>
+            <a:off x="9889236" y="2350008"/>
+            <a:ext cx="64008" cy="64008"/>
+          </a:xfrm>
+          <a:prstGeom prst="ellipse">
+            <a:avLst/>
+          </a:prstGeom>
+          <a:solidFill>
+            <a:srgbClr val="2DA44E"/>
+          </a:solidFill>
+          <a:ln w="12700">
+            <a:solidFill>
+              <a:srgbClr val="2DA44E">
+                <a:alpha val="0"/>
+              </a:srgbClr>
+            </a:solidFill>
+            <a:prstDash val="solid"/>
+          </a:ln>
+        </p:spPr>
+      </p:sp>
+      <p:sp>
+        <p:nvSpPr>
+          <p:cNvPr id="167" name="Shape 165"/>
+          <p:cNvSpPr/>
+          <p:nvPr/>
+        </p:nvSpPr>
+        <p:spPr>
+          <a:xfrm>
+            <a:off x="10392156" y="2487168"/>
+            <a:ext cx="64008" cy="64008"/>
+          </a:xfrm>
+          <a:prstGeom prst="ellipse">
+            <a:avLst/>
+          </a:prstGeom>
+          <a:solidFill>
+            <a:srgbClr val="2DA44E"/>
+          </a:solidFill>
+          <a:ln w="12700">
+            <a:solidFill>
+              <a:srgbClr val="2DA44E">
+                <a:alpha val="0"/>
+              </a:srgbClr>
+            </a:solidFill>
+            <a:prstDash val="solid"/>
+          </a:ln>
+        </p:spPr>
+      </p:sp>
+      <p:sp>
+        <p:nvSpPr>
+          <p:cNvPr id="168" name="Shape 166"/>
+          <p:cNvSpPr/>
+          <p:nvPr/>
+        </p:nvSpPr>
+        <p:spPr>
+          <a:xfrm>
+            <a:off x="10895076" y="2555748"/>
+            <a:ext cx="64008" cy="64008"/>
+          </a:xfrm>
+          <a:prstGeom prst="ellipse">
+            <a:avLst/>
+          </a:prstGeom>
+          <a:solidFill>
+            <a:srgbClr val="2DA44E"/>
+          </a:solidFill>
+          <a:ln w="12700">
+            <a:solidFill>
+              <a:srgbClr val="2DA44E">
+                <a:alpha val="0"/>
+              </a:srgbClr>
+            </a:solidFill>
+            <a:prstDash val="solid"/>
+          </a:ln>
+        </p:spPr>
+      </p:sp>
+      <p:sp>
+        <p:nvSpPr>
+          <p:cNvPr id="169" name="Shape 167"/>
+          <p:cNvSpPr/>
+          <p:nvPr/>
+        </p:nvSpPr>
+        <p:spPr>
+          <a:xfrm>
+            <a:off x="9189720" y="3401568"/>
+            <a:ext cx="438912" cy="292608"/>
+          </a:xfrm>
+          <a:prstGeom prst="roundRect">
+            <a:avLst>
+              <a:gd name="adj" fmla="val 12500"/>
+            </a:avLst>
+          </a:prstGeom>
+          <a:solidFill>
+            <a:srgbClr val="FFFFFF"/>
+          </a:solidFill>
+          <a:ln w="15240">
+            <a:solidFill>
+              <a:srgbClr val="0969DA"/>
+            </a:solidFill>
+            <a:prstDash val="solid"/>
+          </a:ln>
+        </p:spPr>
+      </p:sp>
+      <p:sp>
+        <p:nvSpPr>
+          <p:cNvPr id="170" name="Text 168"/>
+          <p:cNvSpPr/>
+          <p:nvPr/>
+        </p:nvSpPr>
+        <p:spPr>
+          <a:xfrm>
+            <a:off x="9262872" y="3474720"/>
+            <a:ext cx="292608" cy="146304"/>
           </a:xfrm>
           <a:prstGeom prst="rect">
             <a:avLst/>
@@ -2821,7 +5344,268 @@
           <a:bodyPr wrap="square" lIns="0" tIns="0" rIns="0" bIns="0" rtlCol="0" anchor="ctr"/>
           <a:lstStyle/>
           <a:p>
-            <a:pPr algn="l" indent="0" marL="0">
+            <a:pPr algn="ctr" indent="0" marL="0">
+              <a:buNone/>
+            </a:pPr>
+            <a:r>
+              <a:rPr lang="en-US" sz="750" b="1" dirty="0">
+                <a:solidFill>
+                  <a:srgbClr val="0969DA"/>
+                </a:solidFill>
+                <a:latin typeface="Liberation Sans" pitchFamily="34" charset="0"/>
+                <a:ea typeface="Liberation Sans" pitchFamily="34" charset="-122"/>
+                <a:cs typeface="Liberation Sans" pitchFamily="34" charset="-120"/>
+              </a:rPr>
+              <a:t>Title</a:t>
+            </a:r>
+            <a:endParaRPr lang="en-US" sz="750" dirty="0"/>
+          </a:p>
+        </p:txBody>
+      </p:sp>
+      <p:sp>
+        <p:nvSpPr>
+          <p:cNvPr id="171" name="Shape 169"/>
+          <p:cNvSpPr/>
+          <p:nvPr/>
+        </p:nvSpPr>
+        <p:spPr>
+          <a:xfrm>
+            <a:off x="9720072" y="3401568"/>
+            <a:ext cx="438912" cy="292608"/>
+          </a:xfrm>
+          <a:prstGeom prst="roundRect">
+            <a:avLst>
+              <a:gd name="adj" fmla="val 12500"/>
+            </a:avLst>
+          </a:prstGeom>
+          <a:solidFill>
+            <a:srgbClr val="FFFFFF"/>
+          </a:solidFill>
+          <a:ln w="15240">
+            <a:solidFill>
+              <a:srgbClr val="FF7A1A"/>
+            </a:solidFill>
+            <a:prstDash val="solid"/>
+          </a:ln>
+        </p:spPr>
+      </p:sp>
+      <p:sp>
+        <p:nvSpPr>
+          <p:cNvPr id="172" name="Text 170"/>
+          <p:cNvSpPr/>
+          <p:nvPr/>
+        </p:nvSpPr>
+        <p:spPr>
+          <a:xfrm>
+            <a:off x="9793224" y="3474720"/>
+            <a:ext cx="292608" cy="146304"/>
+          </a:xfrm>
+          <a:prstGeom prst="rect">
+            <a:avLst/>
+          </a:prstGeom>
+          <a:noFill/>
+          <a:ln/>
+        </p:spPr>
+        <p:txBody>
+          <a:bodyPr wrap="square" lIns="0" tIns="0" rIns="0" bIns="0" rtlCol="0" anchor="ctr"/>
+          <a:lstStyle/>
+          <a:p>
+            <a:pPr algn="ctr" indent="0" marL="0">
+              <a:buNone/>
+            </a:pPr>
+            <a:r>
+              <a:rPr lang="en-US" sz="750" b="1" dirty="0">
+                <a:solidFill>
+                  <a:srgbClr val="FF7A1A"/>
+                </a:solidFill>
+                <a:latin typeface="Liberation Sans" pitchFamily="34" charset="0"/>
+                <a:ea typeface="Liberation Sans" pitchFamily="34" charset="-122"/>
+                <a:cs typeface="Liberation Sans" pitchFamily="34" charset="-120"/>
+              </a:rPr>
+              <a:t>Box</a:t>
+            </a:r>
+            <a:endParaRPr lang="en-US" sz="750" dirty="0"/>
+          </a:p>
+        </p:txBody>
+      </p:sp>
+      <p:sp>
+        <p:nvSpPr>
+          <p:cNvPr id="173" name="Shape 171"/>
+          <p:cNvSpPr/>
+          <p:nvPr/>
+        </p:nvSpPr>
+        <p:spPr>
+          <a:xfrm>
+            <a:off x="10250424" y="3401568"/>
+            <a:ext cx="438912" cy="292608"/>
+          </a:xfrm>
+          <a:prstGeom prst="roundRect">
+            <a:avLst>
+              <a:gd name="adj" fmla="val 12500"/>
+            </a:avLst>
+          </a:prstGeom>
+          <a:solidFill>
+            <a:srgbClr val="FFFFFF"/>
+          </a:solidFill>
+          <a:ln w="15240">
+            <a:solidFill>
+              <a:srgbClr val="6F42C1"/>
+            </a:solidFill>
+            <a:prstDash val="solid"/>
+          </a:ln>
+        </p:spPr>
+      </p:sp>
+      <p:sp>
+        <p:nvSpPr>
+          <p:cNvPr id="174" name="Text 172"/>
+          <p:cNvSpPr/>
+          <p:nvPr/>
+        </p:nvSpPr>
+        <p:spPr>
+          <a:xfrm>
+            <a:off x="10323576" y="3474720"/>
+            <a:ext cx="292608" cy="146304"/>
+          </a:xfrm>
+          <a:prstGeom prst="rect">
+            <a:avLst/>
+          </a:prstGeom>
+          <a:noFill/>
+          <a:ln/>
+        </p:spPr>
+        <p:txBody>
+          <a:bodyPr wrap="square" lIns="0" tIns="0" rIns="0" bIns="0" rtlCol="0" anchor="ctr"/>
+          <a:lstStyle/>
+          <a:p>
+            <a:pPr algn="ctr" indent="0" marL="0">
+              <a:buNone/>
+            </a:pPr>
+            <a:r>
+              <a:rPr lang="en-US" sz="750" b="1" dirty="0">
+                <a:solidFill>
+                  <a:srgbClr val="6F42C1"/>
+                </a:solidFill>
+                <a:latin typeface="Liberation Sans" pitchFamily="34" charset="0"/>
+                <a:ea typeface="Liberation Sans" pitchFamily="34" charset="-122"/>
+                <a:cs typeface="Liberation Sans" pitchFamily="34" charset="-120"/>
+              </a:rPr>
+              <a:t>Arrow</a:t>
+            </a:r>
+            <a:endParaRPr lang="en-US" sz="750" dirty="0"/>
+          </a:p>
+        </p:txBody>
+      </p:sp>
+      <p:sp>
+        <p:nvSpPr>
+          <p:cNvPr id="175" name="Shape 173"/>
+          <p:cNvSpPr/>
+          <p:nvPr/>
+        </p:nvSpPr>
+        <p:spPr>
+          <a:xfrm>
+            <a:off x="10780776" y="3401568"/>
+            <a:ext cx="438912" cy="292608"/>
+          </a:xfrm>
+          <a:prstGeom prst="roundRect">
+            <a:avLst>
+              <a:gd name="adj" fmla="val 12500"/>
+            </a:avLst>
+          </a:prstGeom>
+          <a:solidFill>
+            <a:srgbClr val="FFFFFF"/>
+          </a:solidFill>
+          <a:ln w="15240">
+            <a:solidFill>
+              <a:srgbClr val="2DA44E"/>
+            </a:solidFill>
+            <a:prstDash val="solid"/>
+          </a:ln>
+        </p:spPr>
+      </p:sp>
+      <p:sp>
+        <p:nvSpPr>
+          <p:cNvPr id="176" name="Text 174"/>
+          <p:cNvSpPr/>
+          <p:nvPr/>
+        </p:nvSpPr>
+        <p:spPr>
+          <a:xfrm>
+            <a:off x="10853928" y="3474720"/>
+            <a:ext cx="292608" cy="146304"/>
+          </a:xfrm>
+          <a:prstGeom prst="rect">
+            <a:avLst/>
+          </a:prstGeom>
+          <a:noFill/>
+          <a:ln/>
+        </p:spPr>
+        <p:txBody>
+          <a:bodyPr wrap="square" lIns="0" tIns="0" rIns="0" bIns="0" rtlCol="0" anchor="ctr"/>
+          <a:lstStyle/>
+          <a:p>
+            <a:pPr algn="ctr" indent="0" marL="0">
+              <a:buNone/>
+            </a:pPr>
+            <a:r>
+              <a:rPr lang="en-US" sz="750" b="1" dirty="0">
+                <a:solidFill>
+                  <a:srgbClr val="2DA44E"/>
+                </a:solidFill>
+                <a:latin typeface="Liberation Sans" pitchFamily="34" charset="0"/>
+                <a:ea typeface="Liberation Sans" pitchFamily="34" charset="-122"/>
+                <a:cs typeface="Liberation Sans" pitchFamily="34" charset="-120"/>
+              </a:rPr>
+              <a:t>Metric</a:t>
+            </a:r>
+            <a:endParaRPr lang="en-US" sz="750" dirty="0"/>
+          </a:p>
+        </p:txBody>
+      </p:sp>
+      <p:sp>
+        <p:nvSpPr>
+          <p:cNvPr id="177" name="Shape 175"/>
+          <p:cNvSpPr/>
+          <p:nvPr/>
+        </p:nvSpPr>
+        <p:spPr>
+          <a:xfrm>
+            <a:off x="8732520" y="2697480"/>
+            <a:ext cx="310896" cy="0"/>
+          </a:xfrm>
+          <a:prstGeom prst="line">
+            <a:avLst/>
+          </a:prstGeom>
+          <a:noFill/>
+          <a:ln w="25400">
+            <a:solidFill>
+              <a:srgbClr val="FF7A1A"/>
+            </a:solidFill>
+            <a:prstDash val="solid"/>
+            <a:tailEnd type="triangle"/>
+          </a:ln>
+        </p:spPr>
+      </p:sp>
+      <p:sp>
+        <p:nvSpPr>
+          <p:cNvPr id="178" name="Text 176"/>
+          <p:cNvSpPr/>
+          <p:nvPr/>
+        </p:nvSpPr>
+        <p:spPr>
+          <a:xfrm>
+            <a:off x="7498080" y="4809744"/>
+            <a:ext cx="3383280" cy="292608"/>
+          </a:xfrm>
+          <a:prstGeom prst="rect">
+            <a:avLst/>
+          </a:prstGeom>
+          <a:noFill/>
+          <a:ln/>
+        </p:spPr>
+        <p:txBody>
+          <a:bodyPr wrap="square" lIns="0" tIns="0" rIns="0" bIns="0" rtlCol="0" anchor="ctr"/>
+          <a:lstStyle/>
+          <a:p>
+            <a:pPr algn="ctr" indent="0" marL="0">
               <a:buNone/>
             </a:pPr>
             <a:r>
@@ -2833,7 +5617,7 @@
                 <a:ea typeface="Liberation Sans" pitchFamily="34" charset="-122"/>
                 <a:cs typeface="Liberation Sans" pitchFamily="34" charset="-120"/>
               </a:rPr>
-              <a:t>shuffle, lesion and localization tests perturb learned organization</a:t>
+              <a:t>Native PPT text, boxes, arrows, and charts make the slide editable.</a:t>
             </a:r>
             <a:endParaRPr lang="en-US" sz="820" dirty="0"/>
           </a:p>
@@ -2841,41 +5625,41 @@
       </p:sp>
       <p:sp>
         <p:nvSpPr>
-          <p:cNvPr id="61" name="Shape 56"/>
-          <p:cNvSpPr/>
-          <p:nvPr/>
-        </p:nvSpPr>
-        <p:spPr>
-          <a:xfrm>
-            <a:off x="9582912" y="5815584"/>
-            <a:ext cx="73152" cy="73152"/>
-          </a:xfrm>
-          <a:prstGeom prst="ellipse">
-            <a:avLst/>
-          </a:prstGeom>
-          <a:solidFill>
-            <a:srgbClr val="009E73"/>
-          </a:solidFill>
-          <a:ln w="12700">
-            <a:solidFill>
-              <a:srgbClr val="009E73">
-                <a:alpha val="0"/>
-              </a:srgbClr>
-            </a:solidFill>
-            <a:prstDash val="solid"/>
-          </a:ln>
-        </p:spPr>
-      </p:sp>
-      <p:sp>
-        <p:nvSpPr>
-          <p:cNvPr id="62" name="Text 57"/>
-          <p:cNvSpPr/>
-          <p:nvPr/>
-        </p:nvSpPr>
-        <p:spPr>
-          <a:xfrm>
-            <a:off x="9729216" y="5742432"/>
-            <a:ext cx="1591056" cy="265176"/>
+          <p:cNvPr id="179" name="Shape 177"/>
+          <p:cNvSpPr/>
+          <p:nvPr/>
+        </p:nvSpPr>
+        <p:spPr>
+          <a:xfrm>
+            <a:off x="7452360" y="5285232"/>
+            <a:ext cx="3886200" cy="384048"/>
+          </a:xfrm>
+          <a:prstGeom prst="roundRect">
+            <a:avLst>
+              <a:gd name="adj" fmla="val 11905"/>
+            </a:avLst>
+          </a:prstGeom>
+          <a:solidFill>
+            <a:srgbClr val="EAF1FA"/>
+          </a:solidFill>
+          <a:ln w="10160">
+            <a:solidFill>
+              <a:srgbClr val="BFD4EA"/>
+            </a:solidFill>
+            <a:prstDash val="solid"/>
+          </a:ln>
+        </p:spPr>
+      </p:sp>
+      <p:sp>
+        <p:nvSpPr>
+          <p:cNvPr id="180" name="Text 178"/>
+          <p:cNvSpPr/>
+          <p:nvPr/>
+        </p:nvSpPr>
+        <p:spPr>
+          <a:xfrm>
+            <a:off x="7662672" y="5431536"/>
+            <a:ext cx="3474720" cy="91440"/>
           </a:xfrm>
           <a:prstGeom prst="rect">
             <a:avLst/>
@@ -2887,7 +5671,7 @@
           <a:bodyPr wrap="square" lIns="0" tIns="0" rIns="0" bIns="0" rtlCol="0" anchor="ctr"/>
           <a:lstStyle/>
           <a:p>
-            <a:pPr algn="l" indent="0" marL="0">
+            <a:pPr algn="ctr" indent="0" marL="0">
               <a:buNone/>
             </a:pPr>
             <a:r>
@@ -2899,7 +5683,7 @@
                 <a:ea typeface="Liberation Sans" pitchFamily="34" charset="-122"/>
                 <a:cs typeface="Liberation Sans" pitchFamily="34" charset="-120"/>
               </a:rPr>
-              <a:t>source-localization baselines bound the classifier claim</a:t>
+              <a:t>Rendered preview + overflow and font checks</a:t>
             </a:r>
             <a:endParaRPr lang="en-US" sz="820" dirty="0"/>
           </a:p>
@@ -2907,41 +5691,41 @@
       </p:sp>
       <p:sp>
         <p:nvSpPr>
-          <p:cNvPr id="63" name="Shape 58"/>
-          <p:cNvSpPr/>
-          <p:nvPr/>
-        </p:nvSpPr>
-        <p:spPr>
-          <a:xfrm>
-            <a:off x="402336" y="6391656"/>
-            <a:ext cx="11375136" cy="301752"/>
+          <p:cNvPr id="181" name="Shape 179"/>
+          <p:cNvSpPr/>
+          <p:nvPr/>
+        </p:nvSpPr>
+        <p:spPr>
+          <a:xfrm>
+            <a:off x="411480" y="6345936"/>
+            <a:ext cx="11384280" cy="310896"/>
           </a:xfrm>
           <a:prstGeom prst="roundRect">
             <a:avLst>
-              <a:gd name="adj" fmla="val 12121"/>
+              <a:gd name="adj" fmla="val 11765"/>
             </a:avLst>
           </a:prstGeom>
           <a:solidFill>
             <a:srgbClr val="EAF1FA"/>
           </a:solidFill>
-          <a:ln w="7620">
-            <a:solidFill>
-              <a:srgbClr val="D5E2F1"/>
-            </a:solidFill>
-            <a:prstDash val="solid"/>
-          </a:ln>
-        </p:spPr>
-      </p:sp>
-      <p:sp>
-        <p:nvSpPr>
-          <p:cNvPr id="64" name="Text 59"/>
-          <p:cNvSpPr/>
-          <p:nvPr/>
-        </p:nvSpPr>
-        <p:spPr>
-          <a:xfrm>
-            <a:off x="612648" y="6464808"/>
-            <a:ext cx="10954512" cy="137160"/>
+          <a:ln w="10160">
+            <a:solidFill>
+              <a:srgbClr val="BFD4EA"/>
+            </a:solidFill>
+            <a:prstDash val="solid"/>
+          </a:ln>
+        </p:spPr>
+      </p:sp>
+      <p:sp>
+        <p:nvSpPr>
+          <p:cNvPr id="182" name="Text 180"/>
+          <p:cNvSpPr/>
+          <p:nvPr/>
+        </p:nvSpPr>
+        <p:spPr>
+          <a:xfrm>
+            <a:off x="713232" y="6455664"/>
+            <a:ext cx="10789920" cy="109728"/>
           </a:xfrm>
           <a:prstGeom prst="rect">
             <a:avLst/>
@@ -2957,7 +5741,7 @@
               <a:buNone/>
             </a:pPr>
             <a:r>
-              <a:rPr lang="en-US" sz="790" dirty="0">
+              <a:rPr lang="en-US" sz="820" dirty="0">
                 <a:solidFill>
                   <a:srgbClr val="15202B"/>
                 </a:solidFill>
@@ -2965,9 +5749,9 @@
                 <a:ea typeface="Liberation Sans" pitchFamily="34" charset="-122"/>
                 <a:cs typeface="Liberation Sans" pitchFamily="34" charset="-120"/>
               </a:rPr>
-              <a:t>Core message: PDE-shaped local relaxation can implement inspectable spatial binding and preserve accuracy under grid refinement, while generic local-kernel and CoordConv controls degrade sharply.</a:t>
+              <a:t>Core idea: keep generated visual blocks complete, then rebuild exact layout and text as editable PowerPoint.</a:t>
             </a:r>
-            <a:endParaRPr lang="en-US" sz="790" dirty="0"/>
+            <a:endParaRPr lang="en-US" sz="820" dirty="0"/>
           </a:p>
         </p:txBody>
       </p:sp>
